--- a/assets/docs/shane-self-intro.pptx
+++ b/assets/docs/shane-self-intro.pptx
@@ -503,7 +503,7 @@
           <a:p>
             <a:r>
               <a:rPr lang="en-US" dirty="0"/>
-              <a:t>自我介紹：黃士銘 Shane，軟體工程師，非本科系轉職背景。</a:t>
+              <a:t>自我介紹：黃士銘 Shane，軟體工程師。職涯經歷：餐飲業、服務業、加拿大打工度假，2023 非本科系轉職。</a:t>
             </a:r>
             <a:endParaRPr lang="en-US" dirty="0"/>
           </a:p>
@@ -591,7 +591,7 @@
           <a:p>
             <a:r>
               <a:rPr lang="en-US" dirty="0"/>
-              <a:t>學歷三段：高師大碩士（在學）、台南應科大養成班、屏科大餐旅管理學士。喜好：出國旅遊、調酒品酒、下廚、Side Project。</a:t>
+              <a:t>學歷：高師大軟體工程與管理學系資訊科技所（在學）、屏科大餐旅管理學士。喜好：出國旅遊、調酒品酒、下廚料理。</a:t>
             </a:r>
             <a:endParaRPr lang="en-US" dirty="0"/>
           </a:p>
@@ -946,7 +946,7 @@
     <p:bg>
       <p:bgPr>
         <a:solidFill>
-          <a:srgbClr val="0F4C5C"/>
+          <a:srgbClr val="FFFFFF"/>
         </a:solidFill>
       </p:bgPr>
     </p:bg>
@@ -972,8 +972,8 @@
         </p:nvSpPr>
         <p:spPr>
           <a:xfrm>
-            <a:off x="685800" y="658368"/>
-            <a:ext cx="5943600" cy="365760"/>
+            <a:off x="777240" y="658368"/>
+            <a:ext cx="5943600" cy="347472"/>
           </a:xfrm>
           <a:prstGeom prst="rect">
             <a:avLst/>
@@ -989,9 +989,9 @@
               <a:buNone/>
             </a:pPr>
             <a:r>
-              <a:rPr lang="en-US" sz="1400" dirty="0">
-                <a:solidFill>
-                  <a:srgbClr val="A9CBD6"/>
+              <a:rPr lang="en-US" sz="1300" dirty="0">
+                <a:solidFill>
+                  <a:srgbClr val="6A7A82"/>
                 </a:solidFill>
                 <a:latin typeface="Microsoft JhengHei" pitchFamily="34" charset="0"/>
                 <a:ea typeface="Microsoft JhengHei" pitchFamily="34" charset="-122"/>
@@ -999,7 +999,7 @@
               </a:rPr>
               <a:t>HI，你好，我是</a:t>
             </a:r>
-            <a:endParaRPr lang="en-US" sz="1400" dirty="0"/>
+            <a:endParaRPr lang="en-US" sz="1300" dirty="0"/>
           </a:p>
         </p:txBody>
       </p:sp>
@@ -1011,7 +1011,7 @@
         </p:nvSpPr>
         <p:spPr>
           <a:xfrm>
-            <a:off x="685800" y="987552"/>
+            <a:off x="777240" y="969264"/>
             <a:ext cx="6766560" cy="777240"/>
           </a:xfrm>
           <a:prstGeom prst="rect">
@@ -1030,7 +1030,7 @@
             <a:r>
               <a:rPr lang="en-US" sz="4000" b="1" dirty="0">
                 <a:solidFill>
-                  <a:srgbClr val="FFFFFF"/>
+                  <a:srgbClr val="1F2D33"/>
                 </a:solidFill>
                 <a:latin typeface="Microsoft JhengHei" pitchFamily="34" charset="0"/>
                 <a:ea typeface="Microsoft JhengHei" pitchFamily="34" charset="-122"/>
@@ -1044,7 +1044,7 @@
             <a:r>
               <a:rPr lang="en-US" sz="4000" b="1" dirty="0">
                 <a:solidFill>
-                  <a:srgbClr val="F4A259"/>
+                  <a:srgbClr val="2E7893"/>
                 </a:solidFill>
                 <a:latin typeface="Microsoft JhengHei" pitchFamily="34" charset="0"/>
                 <a:ea typeface="Microsoft JhengHei" pitchFamily="34" charset="-122"/>
@@ -1064,8 +1064,8 @@
         </p:nvSpPr>
         <p:spPr>
           <a:xfrm>
-            <a:off x="685800" y="1810512"/>
-            <a:ext cx="6583680" cy="411480"/>
+            <a:off x="777240" y="1792224"/>
+            <a:ext cx="6583680" cy="384048"/>
           </a:xfrm>
           <a:prstGeom prst="rect">
             <a:avLst/>
@@ -1081,9 +1081,9 @@
               <a:buNone/>
             </a:pPr>
             <a:r>
-              <a:rPr lang="en-US" sz="1800" b="1" dirty="0">
-                <a:solidFill>
-                  <a:srgbClr val="A9CBD6"/>
+              <a:rPr lang="en-US" sz="1700" b="1" dirty="0">
+                <a:solidFill>
+                  <a:srgbClr val="6A7A82"/>
                 </a:solidFill>
                 <a:latin typeface="Microsoft JhengHei" pitchFamily="34" charset="0"/>
                 <a:ea typeface="Microsoft JhengHei" pitchFamily="34" charset="-122"/>
@@ -1091,7 +1091,7 @@
               </a:rPr>
               <a:t>軟體工程師 ・ AI 應用工程師</a:t>
             </a:r>
-            <a:endParaRPr lang="en-US" sz="1800" dirty="0"/>
+            <a:endParaRPr lang="en-US" sz="1700" dirty="0"/>
           </a:p>
         </p:txBody>
       </p:sp>
@@ -1103,8 +1103,8 @@
         </p:nvSpPr>
         <p:spPr>
           <a:xfrm>
-            <a:off x="685800" y="2395728"/>
-            <a:ext cx="6492240" cy="1554480"/>
+            <a:off x="777240" y="2487168"/>
+            <a:ext cx="2743200" cy="384048"/>
           </a:xfrm>
           <a:prstGeom prst="rect">
             <a:avLst/>
@@ -1113,50 +1113,24 @@
           <a:ln/>
         </p:spPr>
         <p:txBody>
-          <a:bodyPr wrap="square" lIns="0" tIns="0" rIns="0" bIns="0" rtlCol="0" anchor="t"/>
+          <a:bodyPr wrap="square" lIns="0" tIns="0" rIns="0" bIns="0" rtlCol="0" anchor="ctr"/>
           <a:lstStyle/>
           <a:p>
             <a:pPr indent="0" marL="0">
-              <a:lnSpc>
-                <a:spcPct val="130000"/>
-              </a:lnSpc>
-              <a:spcAft>
-                <a:spcPts val="800"/>
-              </a:spcAft>
-              <a:buNone/>
-            </a:pPr>
-            <a:r>
-              <a:rPr lang="en-US" sz="1300" dirty="0">
-                <a:solidFill>
-                  <a:srgbClr val="E9F2F5"/>
-                </a:solidFill>
-                <a:latin typeface="Microsoft JhengHei" pitchFamily="34" charset="0"/>
-                <a:ea typeface="Microsoft JhengHei" pitchFamily="34" charset="-122"/>
-                <a:cs typeface="Microsoft JhengHei" pitchFamily="34" charset="-120"/>
-              </a:rPr>
-              <a:t>目前任職於財團法人農漁會南區資訊中心，擁有約 3 年 C# POS／進銷存系統開發與維護經驗，並在國立高雄師範大學在職進修碩士。</a:t>
-            </a:r>
-            <a:endParaRPr lang="en-US" sz="1300" dirty="0"/>
-          </a:p>
-          <a:p>
-            <a:pPr indent="0" marL="0">
-              <a:lnSpc>
-                <a:spcPct val="130000"/>
-              </a:lnSpc>
-              <a:buNone/>
-            </a:pPr>
-            <a:r>
-              <a:rPr lang="en-US" sz="1300" dirty="0">
-                <a:solidFill>
-                  <a:srgbClr val="E9F2F5"/>
-                </a:solidFill>
-                <a:latin typeface="Microsoft JhengHei" pitchFamily="34" charset="0"/>
-                <a:ea typeface="Microsoft JhengHei" pitchFamily="34" charset="-122"/>
-                <a:cs typeface="Microsoft JhengHei" pitchFamily="34" charset="-120"/>
-              </a:rPr>
-              <a:t>喜歡把又雜又難的需求拆開、整理清楚，做成真正好用的功能；動手寫程式之前，習慣先弄懂商業邏輯與使用者實際的作業方式。</a:t>
-            </a:r>
-            <a:endParaRPr lang="en-US" sz="1300" dirty="0"/>
+              <a:buNone/>
+            </a:pPr>
+            <a:r>
+              <a:rPr lang="en-US" sz="1600" b="1" dirty="0">
+                <a:solidFill>
+                  <a:srgbClr val="0F4C5C"/>
+                </a:solidFill>
+                <a:latin typeface="Microsoft JhengHei" pitchFamily="34" charset="0"/>
+                <a:ea typeface="Microsoft JhengHei" pitchFamily="34" charset="-122"/>
+                <a:cs typeface="Microsoft JhengHei" pitchFamily="34" charset="-120"/>
+              </a:rPr>
+              <a:t>職涯經歷</a:t>
+            </a:r>
+            <a:endParaRPr lang="en-US" sz="1600" dirty="0"/>
           </a:p>
         </p:txBody>
       </p:sp>
@@ -1168,43 +1142,21 @@
         </p:nvSpPr>
         <p:spPr>
           <a:xfrm>
-            <a:off x="685800" y="4069080"/>
-            <a:ext cx="6492240" cy="1572768"/>
-          </a:xfrm>
-          <a:prstGeom prst="roundRect">
-            <a:avLst>
-              <a:gd name="adj" fmla="val 6977"/>
-            </a:avLst>
-          </a:prstGeom>
-          <a:solidFill>
-            <a:srgbClr val="1A5D70"/>
-          </a:solidFill>
-          <a:ln/>
-        </p:spPr>
-      </p:sp>
-      <p:sp>
-        <p:nvSpPr>
-          <p:cNvPr id="7" name="Shape 5"/>
-          <p:cNvSpPr/>
-          <p:nvPr/>
-        </p:nvSpPr>
-        <p:spPr>
-          <a:xfrm>
-            <a:off x="932688" y="4343400"/>
-            <a:ext cx="475488" cy="475488"/>
+            <a:off x="804672" y="2999232"/>
+            <a:ext cx="365760" cy="365760"/>
           </a:xfrm>
           <a:prstGeom prst="ellipse">
             <a:avLst/>
           </a:prstGeom>
           <a:solidFill>
-            <a:srgbClr val="F4A259"/>
+            <a:srgbClr val="0F4C5C"/>
           </a:solidFill>
           <a:ln/>
         </p:spPr>
       </p:sp>
       <p:pic>
         <p:nvPicPr>
-          <p:cNvPr id="8" name="Image 0" descr="preencoded.png">    </p:cNvPr>
+          <p:cNvPr id="7" name="Image 0" descr="preencoded.png">    </p:cNvPr>
           <p:cNvPicPr>
             <a:picLocks noChangeAspect="1"/>
           </p:cNvPicPr>
@@ -1218,8 +1170,8 @@
         </p:blipFill>
         <p:spPr>
           <a:xfrm>
-            <a:off x="1046988" y="4457700"/>
-            <a:ext cx="246888" cy="246888"/>
+            <a:off x="896112" y="3090672"/>
+            <a:ext cx="182880" cy="182880"/>
           </a:xfrm>
           <a:prstGeom prst="rect">
             <a:avLst/>
@@ -1228,14 +1180,53 @@
       </p:pic>
       <p:sp>
         <p:nvSpPr>
+          <p:cNvPr id="8" name="Text 5"/>
+          <p:cNvSpPr/>
+          <p:nvPr/>
+        </p:nvSpPr>
+        <p:spPr>
+          <a:xfrm>
+            <a:off x="1325880" y="2962656"/>
+            <a:ext cx="5669280" cy="310896"/>
+          </a:xfrm>
+          <a:prstGeom prst="rect">
+            <a:avLst/>
+          </a:prstGeom>
+          <a:noFill/>
+          <a:ln/>
+        </p:spPr>
+        <p:txBody>
+          <a:bodyPr wrap="square" lIns="0" tIns="0" rIns="0" bIns="0" rtlCol="0" anchor="ctr"/>
+          <a:lstStyle/>
+          <a:p>
+            <a:pPr indent="0" marL="0">
+              <a:buNone/>
+            </a:pPr>
+            <a:r>
+              <a:rPr lang="en-US" sz="1350" b="1" dirty="0">
+                <a:solidFill>
+                  <a:srgbClr val="1F2D33"/>
+                </a:solidFill>
+                <a:latin typeface="Microsoft JhengHei" pitchFamily="34" charset="0"/>
+                <a:ea typeface="Microsoft JhengHei" pitchFamily="34" charset="-122"/>
+                <a:cs typeface="Microsoft JhengHei" pitchFamily="34" charset="-120"/>
+              </a:rPr>
+              <a:t>餐飲業・服務業</a:t>
+            </a:r>
+            <a:endParaRPr lang="en-US" sz="1350" dirty="0"/>
+          </a:p>
+        </p:txBody>
+      </p:sp>
+      <p:sp>
+        <p:nvSpPr>
           <p:cNvPr id="9" name="Text 6"/>
           <p:cNvSpPr/>
           <p:nvPr/>
         </p:nvSpPr>
         <p:spPr>
           <a:xfrm>
-            <a:off x="1572768" y="4279392"/>
-            <a:ext cx="5394960" cy="384048"/>
+            <a:off x="1325880" y="3273552"/>
+            <a:ext cx="5669280" cy="329184"/>
           </a:xfrm>
           <a:prstGeom prst="rect">
             <a:avLst/>
@@ -1244,332 +1235,50 @@
           <a:ln/>
         </p:spPr>
         <p:txBody>
-          <a:bodyPr wrap="square" lIns="0" tIns="0" rIns="0" bIns="0" rtlCol="0" anchor="ctr"/>
+          <a:bodyPr wrap="square" lIns="0" tIns="0" rIns="0" bIns="0" rtlCol="0" anchor="t"/>
           <a:lstStyle/>
           <a:p>
             <a:pPr indent="0" marL="0">
               <a:buNone/>
             </a:pPr>
             <a:r>
-              <a:rPr lang="en-US" sz="1500" b="1" dirty="0">
-                <a:solidFill>
-                  <a:srgbClr val="F4A259"/>
-                </a:solidFill>
-                <a:latin typeface="Microsoft JhengHei" pitchFamily="34" charset="0"/>
-                <a:ea typeface="Microsoft JhengHei" pitchFamily="34" charset="-122"/>
-                <a:cs typeface="Microsoft JhengHei" pitchFamily="34" charset="-120"/>
-              </a:rPr>
-              <a:t>非本科系轉職</a:t>
-            </a:r>
-            <a:endParaRPr lang="en-US" sz="1500" dirty="0"/>
-          </a:p>
-        </p:txBody>
-      </p:sp>
-      <p:sp>
-        <p:nvSpPr>
-          <p:cNvPr id="10" name="Text 7"/>
-          <p:cNvSpPr/>
-          <p:nvPr/>
-        </p:nvSpPr>
-        <p:spPr>
-          <a:xfrm>
-            <a:off x="1572768" y="4663440"/>
-            <a:ext cx="5349240" cy="868680"/>
-          </a:xfrm>
-          <a:prstGeom prst="rect">
-            <a:avLst/>
-          </a:prstGeom>
-          <a:noFill/>
-          <a:ln/>
-        </p:spPr>
-        <p:txBody>
-          <a:bodyPr wrap="square" lIns="0" tIns="0" rIns="0" bIns="0" rtlCol="0" anchor="t"/>
-          <a:lstStyle/>
-          <a:p>
-            <a:pPr indent="0" marL="0">
-              <a:lnSpc>
-                <a:spcPct val="125000"/>
-              </a:lnSpc>
-              <a:buNone/>
-            </a:pPr>
-            <a:r>
-              <a:rPr lang="en-US" sz="1250" dirty="0">
-                <a:solidFill>
-                  <a:srgbClr val="E9F2F5"/>
-                </a:solidFill>
-                <a:latin typeface="Microsoft JhengHei" pitchFamily="34" charset="0"/>
-                <a:ea typeface="Microsoft JhengHei" pitchFamily="34" charset="-122"/>
-                <a:cs typeface="Microsoft JhengHei" pitchFamily="34" charset="-120"/>
-              </a:rPr>
-              <a:t>餐旅管理系出身，做過飯店、廚師與業務；2023 年透過政府養成班正式跨進軟體開發，把服務業磨出來的溝通力與抗壓性帶進工程。</a:t>
-            </a:r>
-            <a:endParaRPr lang="en-US" sz="1250" dirty="0"/>
-          </a:p>
-        </p:txBody>
-      </p:sp>
-      <p:sp>
-        <p:nvSpPr>
-          <p:cNvPr id="11" name="Text 8"/>
-          <p:cNvSpPr/>
-          <p:nvPr/>
-        </p:nvSpPr>
-        <p:spPr>
-          <a:xfrm>
-            <a:off x="685800" y="5943600"/>
-            <a:ext cx="658368" cy="347472"/>
-          </a:xfrm>
-          <a:prstGeom prst="roundRect">
-            <a:avLst>
-              <a:gd name="adj" fmla="val 50000"/>
-            </a:avLst>
-          </a:prstGeom>
-          <a:solidFill>
-            <a:srgbClr val="1A5D70"/>
-          </a:solidFill>
-          <a:ln w="9525">
-            <a:solidFill>
-              <a:srgbClr val="1F7A96"/>
-            </a:solidFill>
-          </a:ln>
-        </p:spPr>
-        <p:txBody>
-          <a:bodyPr wrap="square" lIns="0" tIns="0" rIns="0" bIns="0" rtlCol="0" anchor="ctr"/>
-          <a:lstStyle/>
-          <a:p>
-            <a:pPr algn="ctr" indent="0" marL="0">
-              <a:buNone/>
-            </a:pPr>
-            <a:r>
-              <a:rPr lang="en-US" sz="1100" dirty="0">
-                <a:solidFill>
-                  <a:srgbClr val="C8E0E8"/>
-                </a:solidFill>
-                <a:latin typeface="Microsoft JhengHei" pitchFamily="34" charset="0"/>
-                <a:ea typeface="Microsoft JhengHei" pitchFamily="34" charset="-122"/>
-                <a:cs typeface="Microsoft JhengHei" pitchFamily="34" charset="-120"/>
-              </a:rPr>
-              <a:t>C#</a:t>
-            </a:r>
-            <a:endParaRPr lang="en-US" sz="1100" dirty="0"/>
-          </a:p>
-        </p:txBody>
-      </p:sp>
-      <p:sp>
-        <p:nvSpPr>
-          <p:cNvPr id="12" name="Text 9"/>
-          <p:cNvSpPr/>
-          <p:nvPr/>
-        </p:nvSpPr>
-        <p:spPr>
-          <a:xfrm>
-            <a:off x="1508760" y="5943600"/>
-            <a:ext cx="987552" cy="347472"/>
-          </a:xfrm>
-          <a:prstGeom prst="roundRect">
-            <a:avLst>
-              <a:gd name="adj" fmla="val 50000"/>
-            </a:avLst>
-          </a:prstGeom>
-          <a:solidFill>
-            <a:srgbClr val="1A5D70"/>
-          </a:solidFill>
-          <a:ln w="9525">
-            <a:solidFill>
-              <a:srgbClr val="1F7A96"/>
-            </a:solidFill>
-          </a:ln>
-        </p:spPr>
-        <p:txBody>
-          <a:bodyPr wrap="square" lIns="0" tIns="0" rIns="0" bIns="0" rtlCol="0" anchor="ctr"/>
-          <a:lstStyle/>
-          <a:p>
-            <a:pPr algn="ctr" indent="0" marL="0">
-              <a:buNone/>
-            </a:pPr>
-            <a:r>
-              <a:rPr lang="en-US" sz="1100" dirty="0">
-                <a:solidFill>
-                  <a:srgbClr val="C8E0E8"/>
-                </a:solidFill>
-                <a:latin typeface="Microsoft JhengHei" pitchFamily="34" charset="0"/>
-                <a:ea typeface="Microsoft JhengHei" pitchFamily="34" charset="-122"/>
-                <a:cs typeface="Microsoft JhengHei" pitchFamily="34" charset="-120"/>
-              </a:rPr>
-              <a:t>ASP.NET</a:t>
-            </a:r>
-            <a:endParaRPr lang="en-US" sz="1100" dirty="0"/>
-          </a:p>
-        </p:txBody>
-      </p:sp>
-      <p:sp>
-        <p:nvSpPr>
-          <p:cNvPr id="13" name="Text 10"/>
-          <p:cNvSpPr/>
-          <p:nvPr/>
-        </p:nvSpPr>
-        <p:spPr>
-          <a:xfrm>
-            <a:off x="2660904" y="5943600"/>
-            <a:ext cx="1170432" cy="347472"/>
-          </a:xfrm>
-          <a:prstGeom prst="roundRect">
-            <a:avLst>
-              <a:gd name="adj" fmla="val 50000"/>
-            </a:avLst>
-          </a:prstGeom>
-          <a:solidFill>
-            <a:srgbClr val="1A5D70"/>
-          </a:solidFill>
-          <a:ln w="9525">
-            <a:solidFill>
-              <a:srgbClr val="1F7A96"/>
-            </a:solidFill>
-          </a:ln>
-        </p:spPr>
-        <p:txBody>
-          <a:bodyPr wrap="square" lIns="0" tIns="0" rIns="0" bIns="0" rtlCol="0" anchor="ctr"/>
-          <a:lstStyle/>
-          <a:p>
-            <a:pPr algn="ctr" indent="0" marL="0">
-              <a:buNone/>
-            </a:pPr>
-            <a:r>
-              <a:rPr lang="en-US" sz="1100" dirty="0">
-                <a:solidFill>
-                  <a:srgbClr val="C8E0E8"/>
-                </a:solidFill>
-                <a:latin typeface="Microsoft JhengHei" pitchFamily="34" charset="0"/>
-                <a:ea typeface="Microsoft JhengHei" pitchFamily="34" charset="-122"/>
-                <a:cs typeface="Microsoft JhengHei" pitchFamily="34" charset="-120"/>
-              </a:rPr>
-              <a:t>SQL Server</a:t>
-            </a:r>
-            <a:endParaRPr lang="en-US" sz="1100" dirty="0"/>
-          </a:p>
-        </p:txBody>
-      </p:sp>
-      <p:sp>
-        <p:nvSpPr>
-          <p:cNvPr id="14" name="Text 11"/>
-          <p:cNvSpPr/>
-          <p:nvPr/>
-        </p:nvSpPr>
-        <p:spPr>
-          <a:xfrm>
-            <a:off x="3995928" y="5943600"/>
-            <a:ext cx="1115568" cy="347472"/>
-          </a:xfrm>
-          <a:prstGeom prst="roundRect">
-            <a:avLst>
-              <a:gd name="adj" fmla="val 50000"/>
-            </a:avLst>
-          </a:prstGeom>
-          <a:solidFill>
-            <a:srgbClr val="1A5D70"/>
-          </a:solidFill>
-          <a:ln w="9525">
-            <a:solidFill>
-              <a:srgbClr val="1F7A96"/>
-            </a:solidFill>
-          </a:ln>
-        </p:spPr>
-        <p:txBody>
-          <a:bodyPr wrap="square" lIns="0" tIns="0" rIns="0" bIns="0" rtlCol="0" anchor="ctr"/>
-          <a:lstStyle/>
-          <a:p>
-            <a:pPr algn="ctr" indent="0" marL="0">
-              <a:buNone/>
-            </a:pPr>
-            <a:r>
-              <a:rPr lang="en-US" sz="1100" dirty="0">
-                <a:solidFill>
-                  <a:srgbClr val="C8E0E8"/>
-                </a:solidFill>
-                <a:latin typeface="Microsoft JhengHei" pitchFamily="34" charset="0"/>
-                <a:ea typeface="Microsoft JhengHei" pitchFamily="34" charset="-122"/>
-                <a:cs typeface="Microsoft JhengHei" pitchFamily="34" charset="-120"/>
-              </a:rPr>
-              <a:t>JavaScript</a:t>
-            </a:r>
-            <a:endParaRPr lang="en-US" sz="1100" dirty="0"/>
-          </a:p>
-        </p:txBody>
-      </p:sp>
-      <p:sp>
-        <p:nvSpPr>
-          <p:cNvPr id="15" name="Text 12"/>
-          <p:cNvSpPr/>
-          <p:nvPr/>
-        </p:nvSpPr>
-        <p:spPr>
-          <a:xfrm>
-            <a:off x="5276088" y="5943600"/>
-            <a:ext cx="1078992" cy="347472"/>
-          </a:xfrm>
-          <a:prstGeom prst="roundRect">
-            <a:avLst>
-              <a:gd name="adj" fmla="val 50000"/>
-            </a:avLst>
-          </a:prstGeom>
-          <a:solidFill>
-            <a:srgbClr val="1A5D70"/>
-          </a:solidFill>
-          <a:ln w="9525">
-            <a:solidFill>
-              <a:srgbClr val="1F7A96"/>
-            </a:solidFill>
-          </a:ln>
-        </p:spPr>
-        <p:txBody>
-          <a:bodyPr wrap="square" lIns="0" tIns="0" rIns="0" bIns="0" rtlCol="0" anchor="ctr"/>
-          <a:lstStyle/>
-          <a:p>
-            <a:pPr algn="ctr" indent="0" marL="0">
-              <a:buNone/>
-            </a:pPr>
-            <a:r>
-              <a:rPr lang="en-US" sz="1100" dirty="0">
-                <a:solidFill>
-                  <a:srgbClr val="C8E0E8"/>
-                </a:solidFill>
-                <a:latin typeface="Microsoft JhengHei" pitchFamily="34" charset="0"/>
-                <a:ea typeface="Microsoft JhengHei" pitchFamily="34" charset="-122"/>
-                <a:cs typeface="Microsoft JhengHei" pitchFamily="34" charset="-120"/>
-              </a:rPr>
-              <a:t>LLM 微調</a:t>
-            </a:r>
-            <a:endParaRPr lang="en-US" sz="1100" dirty="0"/>
-          </a:p>
-        </p:txBody>
-      </p:sp>
-      <p:sp>
-        <p:nvSpPr>
-          <p:cNvPr id="16" name="Shape 13"/>
-          <p:cNvSpPr/>
-          <p:nvPr/>
-        </p:nvSpPr>
-        <p:spPr>
-          <a:xfrm>
-            <a:off x="8092440" y="1600200"/>
-            <a:ext cx="3246120" cy="3246120"/>
+              <a:rPr lang="en-US" sz="1150" dirty="0">
+                <a:solidFill>
+                  <a:srgbClr val="6A7A82"/>
+                </a:solidFill>
+                <a:latin typeface="Microsoft JhengHei" pitchFamily="34" charset="0"/>
+                <a:ea typeface="Microsoft JhengHei" pitchFamily="34" charset="-122"/>
+                <a:cs typeface="Microsoft JhengHei" pitchFamily="34" charset="-120"/>
+              </a:rPr>
+              <a:t>做過旅店櫃檯、烈酒銷售、中餐廚師與內場主管</a:t>
+            </a:r>
+            <a:endParaRPr lang="en-US" sz="1150" dirty="0"/>
+          </a:p>
+        </p:txBody>
+      </p:sp>
+      <p:sp>
+        <p:nvSpPr>
+          <p:cNvPr id="10" name="Shape 7"/>
+          <p:cNvSpPr/>
+          <p:nvPr/>
+        </p:nvSpPr>
+        <p:spPr>
+          <a:xfrm>
+            <a:off x="804672" y="3803904"/>
+            <a:ext cx="365760" cy="365760"/>
           </a:xfrm>
           <a:prstGeom prst="ellipse">
             <a:avLst/>
           </a:prstGeom>
           <a:solidFill>
-            <a:srgbClr val="1A5D70"/>
-          </a:solidFill>
-          <a:ln w="22225">
-            <a:solidFill>
-              <a:srgbClr val="A9CBD6"/>
-            </a:solidFill>
-            <a:prstDash val="dash"/>
-          </a:ln>
+            <a:srgbClr val="0F4C5C"/>
+          </a:solidFill>
+          <a:ln/>
         </p:spPr>
       </p:sp>
       <p:pic>
         <p:nvPicPr>
-          <p:cNvPr id="17" name="Image 1" descr="preencoded.png">    </p:cNvPr>
+          <p:cNvPr id="11" name="Image 1" descr="preencoded.png">    </p:cNvPr>
           <p:cNvPicPr>
             <a:picLocks noChangeAspect="1"/>
           </p:cNvPicPr>
@@ -1583,7 +1292,491 @@
         </p:blipFill>
         <p:spPr>
           <a:xfrm>
-            <a:off x="9436608" y="2395728"/>
+            <a:off x="896112" y="3895344"/>
+            <a:ext cx="182880" cy="182880"/>
+          </a:xfrm>
+          <a:prstGeom prst="rect">
+            <a:avLst/>
+          </a:prstGeom>
+        </p:spPr>
+      </p:pic>
+      <p:sp>
+        <p:nvSpPr>
+          <p:cNvPr id="12" name="Text 8"/>
+          <p:cNvSpPr/>
+          <p:nvPr/>
+        </p:nvSpPr>
+        <p:spPr>
+          <a:xfrm>
+            <a:off x="1325880" y="3767328"/>
+            <a:ext cx="5669280" cy="310896"/>
+          </a:xfrm>
+          <a:prstGeom prst="rect">
+            <a:avLst/>
+          </a:prstGeom>
+          <a:noFill/>
+          <a:ln/>
+        </p:spPr>
+        <p:txBody>
+          <a:bodyPr wrap="square" lIns="0" tIns="0" rIns="0" bIns="0" rtlCol="0" anchor="ctr"/>
+          <a:lstStyle/>
+          <a:p>
+            <a:pPr indent="0" marL="0">
+              <a:buNone/>
+            </a:pPr>
+            <a:r>
+              <a:rPr lang="en-US" sz="1350" b="1" dirty="0">
+                <a:solidFill>
+                  <a:srgbClr val="1F2D33"/>
+                </a:solidFill>
+                <a:latin typeface="Microsoft JhengHei" pitchFamily="34" charset="0"/>
+                <a:ea typeface="Microsoft JhengHei" pitchFamily="34" charset="-122"/>
+                <a:cs typeface="Microsoft JhengHei" pitchFamily="34" charset="-120"/>
+              </a:rPr>
+              <a:t>加拿大打工度假</a:t>
+            </a:r>
+            <a:endParaRPr lang="en-US" sz="1350" dirty="0"/>
+          </a:p>
+        </p:txBody>
+      </p:sp>
+      <p:sp>
+        <p:nvSpPr>
+          <p:cNvPr id="13" name="Text 9"/>
+          <p:cNvSpPr/>
+          <p:nvPr/>
+        </p:nvSpPr>
+        <p:spPr>
+          <a:xfrm>
+            <a:off x="1325880" y="4078224"/>
+            <a:ext cx="5669280" cy="329184"/>
+          </a:xfrm>
+          <a:prstGeom prst="rect">
+            <a:avLst/>
+          </a:prstGeom>
+          <a:noFill/>
+          <a:ln/>
+        </p:spPr>
+        <p:txBody>
+          <a:bodyPr wrap="square" lIns="0" tIns="0" rIns="0" bIns="0" rtlCol="0" anchor="t"/>
+          <a:lstStyle/>
+          <a:p>
+            <a:pPr indent="0" marL="0">
+              <a:buNone/>
+            </a:pPr>
+            <a:r>
+              <a:rPr lang="en-US" sz="1150" dirty="0">
+                <a:solidFill>
+                  <a:srgbClr val="6A7A82"/>
+                </a:solidFill>
+                <a:latin typeface="Microsoft JhengHei" pitchFamily="34" charset="0"/>
+                <a:ea typeface="Microsoft JhengHei" pitchFamily="34" charset="-122"/>
+                <a:cs typeface="Microsoft JhengHei" pitchFamily="34" charset="-120"/>
+              </a:rPr>
+              <a:t>在班夫國家公園的度假飯店工作、生活一整年</a:t>
+            </a:r>
+            <a:endParaRPr lang="en-US" sz="1150" dirty="0"/>
+          </a:p>
+        </p:txBody>
+      </p:sp>
+      <p:sp>
+        <p:nvSpPr>
+          <p:cNvPr id="14" name="Shape 10"/>
+          <p:cNvSpPr/>
+          <p:nvPr/>
+        </p:nvSpPr>
+        <p:spPr>
+          <a:xfrm>
+            <a:off x="804672" y="4608576"/>
+            <a:ext cx="365760" cy="365760"/>
+          </a:xfrm>
+          <a:prstGeom prst="ellipse">
+            <a:avLst/>
+          </a:prstGeom>
+          <a:solidFill>
+            <a:srgbClr val="0F4C5C"/>
+          </a:solidFill>
+          <a:ln/>
+        </p:spPr>
+      </p:sp>
+      <p:pic>
+        <p:nvPicPr>
+          <p:cNvPr id="15" name="Image 2" descr="preencoded.png">    </p:cNvPr>
+          <p:cNvPicPr>
+            <a:picLocks noChangeAspect="1"/>
+          </p:cNvPicPr>
+          <p:nvPr/>
+        </p:nvPicPr>
+        <p:blipFill>
+          <a:blip r:embed="rId3"/>
+          <a:stretch>
+            <a:fillRect/>
+          </a:stretch>
+        </p:blipFill>
+        <p:spPr>
+          <a:xfrm>
+            <a:off x="896112" y="4700016"/>
+            <a:ext cx="182880" cy="182880"/>
+          </a:xfrm>
+          <a:prstGeom prst="rect">
+            <a:avLst/>
+          </a:prstGeom>
+        </p:spPr>
+      </p:pic>
+      <p:sp>
+        <p:nvSpPr>
+          <p:cNvPr id="16" name="Text 11"/>
+          <p:cNvSpPr/>
+          <p:nvPr/>
+        </p:nvSpPr>
+        <p:spPr>
+          <a:xfrm>
+            <a:off x="1325880" y="4572000"/>
+            <a:ext cx="5669280" cy="310896"/>
+          </a:xfrm>
+          <a:prstGeom prst="rect">
+            <a:avLst/>
+          </a:prstGeom>
+          <a:noFill/>
+          <a:ln/>
+        </p:spPr>
+        <p:txBody>
+          <a:bodyPr wrap="square" lIns="0" tIns="0" rIns="0" bIns="0" rtlCol="0" anchor="ctr"/>
+          <a:lstStyle/>
+          <a:p>
+            <a:pPr indent="0" marL="0">
+              <a:buNone/>
+            </a:pPr>
+            <a:r>
+              <a:rPr lang="en-US" sz="1350" b="1" dirty="0">
+                <a:solidFill>
+                  <a:srgbClr val="1F2D33"/>
+                </a:solidFill>
+                <a:latin typeface="Microsoft JhengHei" pitchFamily="34" charset="0"/>
+                <a:ea typeface="Microsoft JhengHei" pitchFamily="34" charset="-122"/>
+                <a:cs typeface="Microsoft JhengHei" pitchFamily="34" charset="-120"/>
+              </a:rPr>
+              <a:t>非本科系轉職（2023）</a:t>
+            </a:r>
+            <a:endParaRPr lang="en-US" sz="1350" dirty="0"/>
+          </a:p>
+        </p:txBody>
+      </p:sp>
+      <p:sp>
+        <p:nvSpPr>
+          <p:cNvPr id="17" name="Text 12"/>
+          <p:cNvSpPr/>
+          <p:nvPr/>
+        </p:nvSpPr>
+        <p:spPr>
+          <a:xfrm>
+            <a:off x="1325880" y="4882896"/>
+            <a:ext cx="5669280" cy="329184"/>
+          </a:xfrm>
+          <a:prstGeom prst="rect">
+            <a:avLst/>
+          </a:prstGeom>
+          <a:noFill/>
+          <a:ln/>
+        </p:spPr>
+        <p:txBody>
+          <a:bodyPr wrap="square" lIns="0" tIns="0" rIns="0" bIns="0" rtlCol="0" anchor="t"/>
+          <a:lstStyle/>
+          <a:p>
+            <a:pPr indent="0" marL="0">
+              <a:buNone/>
+            </a:pPr>
+            <a:r>
+              <a:rPr lang="en-US" sz="1150" dirty="0">
+                <a:solidFill>
+                  <a:srgbClr val="6A7A82"/>
+                </a:solidFill>
+                <a:latin typeface="Microsoft JhengHei" pitchFamily="34" charset="0"/>
+                <a:ea typeface="Microsoft JhengHei" pitchFamily="34" charset="-122"/>
+                <a:cs typeface="Microsoft JhengHei" pitchFamily="34" charset="-120"/>
+              </a:rPr>
+              <a:t>現任財團法人農漁會南區資訊中心 助理工程師</a:t>
+            </a:r>
+            <a:endParaRPr lang="en-US" sz="1150" dirty="0"/>
+          </a:p>
+        </p:txBody>
+      </p:sp>
+      <p:sp>
+        <p:nvSpPr>
+          <p:cNvPr id="18" name="Text 13"/>
+          <p:cNvSpPr/>
+          <p:nvPr/>
+        </p:nvSpPr>
+        <p:spPr>
+          <a:xfrm>
+            <a:off x="777240" y="5742432"/>
+            <a:ext cx="658368" cy="347472"/>
+          </a:xfrm>
+          <a:prstGeom prst="roundRect">
+            <a:avLst>
+              <a:gd name="adj" fmla="val 50000"/>
+            </a:avLst>
+          </a:prstGeom>
+          <a:solidFill>
+            <a:srgbClr val="FFFFFF"/>
+          </a:solidFill>
+          <a:ln w="12700">
+            <a:solidFill>
+              <a:srgbClr val="C6D4DA"/>
+            </a:solidFill>
+          </a:ln>
+        </p:spPr>
+        <p:txBody>
+          <a:bodyPr wrap="square" lIns="0" tIns="0" rIns="0" bIns="0" rtlCol="0" anchor="ctr"/>
+          <a:lstStyle/>
+          <a:p>
+            <a:pPr algn="ctr" indent="0" marL="0">
+              <a:buNone/>
+            </a:pPr>
+            <a:r>
+              <a:rPr lang="en-US" sz="1100" dirty="0">
+                <a:solidFill>
+                  <a:srgbClr val="3D5560"/>
+                </a:solidFill>
+                <a:latin typeface="Microsoft JhengHei" pitchFamily="34" charset="0"/>
+                <a:ea typeface="Microsoft JhengHei" pitchFamily="34" charset="-122"/>
+                <a:cs typeface="Microsoft JhengHei" pitchFamily="34" charset="-120"/>
+              </a:rPr>
+              <a:t>C#</a:t>
+            </a:r>
+            <a:endParaRPr lang="en-US" sz="1100" dirty="0"/>
+          </a:p>
+        </p:txBody>
+      </p:sp>
+      <p:sp>
+        <p:nvSpPr>
+          <p:cNvPr id="19" name="Text 14"/>
+          <p:cNvSpPr/>
+          <p:nvPr/>
+        </p:nvSpPr>
+        <p:spPr>
+          <a:xfrm>
+            <a:off x="1600200" y="5742432"/>
+            <a:ext cx="987552" cy="347472"/>
+          </a:xfrm>
+          <a:prstGeom prst="roundRect">
+            <a:avLst>
+              <a:gd name="adj" fmla="val 50000"/>
+            </a:avLst>
+          </a:prstGeom>
+          <a:solidFill>
+            <a:srgbClr val="FFFFFF"/>
+          </a:solidFill>
+          <a:ln w="12700">
+            <a:solidFill>
+              <a:srgbClr val="C6D4DA"/>
+            </a:solidFill>
+          </a:ln>
+        </p:spPr>
+        <p:txBody>
+          <a:bodyPr wrap="square" lIns="0" tIns="0" rIns="0" bIns="0" rtlCol="0" anchor="ctr"/>
+          <a:lstStyle/>
+          <a:p>
+            <a:pPr algn="ctr" indent="0" marL="0">
+              <a:buNone/>
+            </a:pPr>
+            <a:r>
+              <a:rPr lang="en-US" sz="1100" dirty="0">
+                <a:solidFill>
+                  <a:srgbClr val="3D5560"/>
+                </a:solidFill>
+                <a:latin typeface="Microsoft JhengHei" pitchFamily="34" charset="0"/>
+                <a:ea typeface="Microsoft JhengHei" pitchFamily="34" charset="-122"/>
+                <a:cs typeface="Microsoft JhengHei" pitchFamily="34" charset="-120"/>
+              </a:rPr>
+              <a:t>ASP.NET</a:t>
+            </a:r>
+            <a:endParaRPr lang="en-US" sz="1100" dirty="0"/>
+          </a:p>
+        </p:txBody>
+      </p:sp>
+      <p:sp>
+        <p:nvSpPr>
+          <p:cNvPr id="20" name="Text 15"/>
+          <p:cNvSpPr/>
+          <p:nvPr/>
+        </p:nvSpPr>
+        <p:spPr>
+          <a:xfrm>
+            <a:off x="2752344" y="5742432"/>
+            <a:ext cx="1170432" cy="347472"/>
+          </a:xfrm>
+          <a:prstGeom prst="roundRect">
+            <a:avLst>
+              <a:gd name="adj" fmla="val 50000"/>
+            </a:avLst>
+          </a:prstGeom>
+          <a:solidFill>
+            <a:srgbClr val="FFFFFF"/>
+          </a:solidFill>
+          <a:ln w="12700">
+            <a:solidFill>
+              <a:srgbClr val="C6D4DA"/>
+            </a:solidFill>
+          </a:ln>
+        </p:spPr>
+        <p:txBody>
+          <a:bodyPr wrap="square" lIns="0" tIns="0" rIns="0" bIns="0" rtlCol="0" anchor="ctr"/>
+          <a:lstStyle/>
+          <a:p>
+            <a:pPr algn="ctr" indent="0" marL="0">
+              <a:buNone/>
+            </a:pPr>
+            <a:r>
+              <a:rPr lang="en-US" sz="1100" dirty="0">
+                <a:solidFill>
+                  <a:srgbClr val="3D5560"/>
+                </a:solidFill>
+                <a:latin typeface="Microsoft JhengHei" pitchFamily="34" charset="0"/>
+                <a:ea typeface="Microsoft JhengHei" pitchFamily="34" charset="-122"/>
+                <a:cs typeface="Microsoft JhengHei" pitchFamily="34" charset="-120"/>
+              </a:rPr>
+              <a:t>SQL Server</a:t>
+            </a:r>
+            <a:endParaRPr lang="en-US" sz="1100" dirty="0"/>
+          </a:p>
+        </p:txBody>
+      </p:sp>
+      <p:sp>
+        <p:nvSpPr>
+          <p:cNvPr id="21" name="Text 16"/>
+          <p:cNvSpPr/>
+          <p:nvPr/>
+        </p:nvSpPr>
+        <p:spPr>
+          <a:xfrm>
+            <a:off x="4087368" y="5742432"/>
+            <a:ext cx="1115568" cy="347472"/>
+          </a:xfrm>
+          <a:prstGeom prst="roundRect">
+            <a:avLst>
+              <a:gd name="adj" fmla="val 50000"/>
+            </a:avLst>
+          </a:prstGeom>
+          <a:solidFill>
+            <a:srgbClr val="FFFFFF"/>
+          </a:solidFill>
+          <a:ln w="12700">
+            <a:solidFill>
+              <a:srgbClr val="C6D4DA"/>
+            </a:solidFill>
+          </a:ln>
+        </p:spPr>
+        <p:txBody>
+          <a:bodyPr wrap="square" lIns="0" tIns="0" rIns="0" bIns="0" rtlCol="0" anchor="ctr"/>
+          <a:lstStyle/>
+          <a:p>
+            <a:pPr algn="ctr" indent="0" marL="0">
+              <a:buNone/>
+            </a:pPr>
+            <a:r>
+              <a:rPr lang="en-US" sz="1100" dirty="0">
+                <a:solidFill>
+                  <a:srgbClr val="3D5560"/>
+                </a:solidFill>
+                <a:latin typeface="Microsoft JhengHei" pitchFamily="34" charset="0"/>
+                <a:ea typeface="Microsoft JhengHei" pitchFamily="34" charset="-122"/>
+                <a:cs typeface="Microsoft JhengHei" pitchFamily="34" charset="-120"/>
+              </a:rPr>
+              <a:t>JavaScript</a:t>
+            </a:r>
+            <a:endParaRPr lang="en-US" sz="1100" dirty="0"/>
+          </a:p>
+        </p:txBody>
+      </p:sp>
+      <p:sp>
+        <p:nvSpPr>
+          <p:cNvPr id="22" name="Text 17"/>
+          <p:cNvSpPr/>
+          <p:nvPr/>
+        </p:nvSpPr>
+        <p:spPr>
+          <a:xfrm>
+            <a:off x="5367528" y="5742432"/>
+            <a:ext cx="1078992" cy="347472"/>
+          </a:xfrm>
+          <a:prstGeom prst="roundRect">
+            <a:avLst>
+              <a:gd name="adj" fmla="val 50000"/>
+            </a:avLst>
+          </a:prstGeom>
+          <a:solidFill>
+            <a:srgbClr val="FFFFFF"/>
+          </a:solidFill>
+          <a:ln w="12700">
+            <a:solidFill>
+              <a:srgbClr val="C6D4DA"/>
+            </a:solidFill>
+          </a:ln>
+        </p:spPr>
+        <p:txBody>
+          <a:bodyPr wrap="square" lIns="0" tIns="0" rIns="0" bIns="0" rtlCol="0" anchor="ctr"/>
+          <a:lstStyle/>
+          <a:p>
+            <a:pPr algn="ctr" indent="0" marL="0">
+              <a:buNone/>
+            </a:pPr>
+            <a:r>
+              <a:rPr lang="en-US" sz="1100" dirty="0">
+                <a:solidFill>
+                  <a:srgbClr val="3D5560"/>
+                </a:solidFill>
+                <a:latin typeface="Microsoft JhengHei" pitchFamily="34" charset="0"/>
+                <a:ea typeface="Microsoft JhengHei" pitchFamily="34" charset="-122"/>
+                <a:cs typeface="Microsoft JhengHei" pitchFamily="34" charset="-120"/>
+              </a:rPr>
+              <a:t>LLM 微調</a:t>
+            </a:r>
+            <a:endParaRPr lang="en-US" sz="1100" dirty="0"/>
+          </a:p>
+        </p:txBody>
+      </p:sp>
+      <p:sp>
+        <p:nvSpPr>
+          <p:cNvPr id="23" name="Shape 18"/>
+          <p:cNvSpPr/>
+          <p:nvPr/>
+        </p:nvSpPr>
+        <p:spPr>
+          <a:xfrm>
+            <a:off x="8138160" y="1691640"/>
+            <a:ext cx="3200400" cy="3200400"/>
+          </a:xfrm>
+          <a:prstGeom prst="ellipse">
+            <a:avLst/>
+          </a:prstGeom>
+          <a:solidFill>
+            <a:srgbClr val="F4F8F9"/>
+          </a:solidFill>
+          <a:ln w="22225">
+            <a:solidFill>
+              <a:srgbClr val="C6D4DA"/>
+            </a:solidFill>
+            <a:prstDash val="dash"/>
+          </a:ln>
+        </p:spPr>
+      </p:sp>
+      <p:pic>
+        <p:nvPicPr>
+          <p:cNvPr id="24" name="Image 3" descr="preencoded.png">    </p:cNvPr>
+          <p:cNvPicPr>
+            <a:picLocks noChangeAspect="1"/>
+          </p:cNvPicPr>
+          <p:nvPr/>
+        </p:nvPicPr>
+        <p:blipFill>
+          <a:blip r:embed="rId4"/>
+          <a:stretch>
+            <a:fillRect/>
+          </a:stretch>
+        </p:blipFill>
+        <p:spPr>
+          <a:xfrm>
+            <a:off x="9464040" y="2487168"/>
             <a:ext cx="548640" cy="548640"/>
           </a:xfrm>
           <a:prstGeom prst="rect">
@@ -1593,14 +1786,14 @@
       </p:pic>
       <p:sp>
         <p:nvSpPr>
-          <p:cNvPr id="18" name="Text 14"/>
-          <p:cNvSpPr/>
-          <p:nvPr/>
-        </p:nvSpPr>
-        <p:spPr>
-          <a:xfrm>
-            <a:off x="8092440" y="3035808"/>
-            <a:ext cx="3246120" cy="411480"/>
+          <p:cNvPr id="25" name="Text 19"/>
+          <p:cNvSpPr/>
+          <p:nvPr/>
+        </p:nvSpPr>
+        <p:spPr>
+          <a:xfrm>
+            <a:off x="8138160" y="3127248"/>
+            <a:ext cx="3200400" cy="411480"/>
           </a:xfrm>
           <a:prstGeom prst="rect">
             <a:avLst/>
@@ -1618,7 +1811,7 @@
             <a:r>
               <a:rPr lang="en-US" sz="1600" b="1" dirty="0">
                 <a:solidFill>
-                  <a:srgbClr val="FFFFFF"/>
+                  <a:srgbClr val="1F2D33"/>
                 </a:solidFill>
                 <a:latin typeface="Microsoft JhengHei" pitchFamily="34" charset="0"/>
                 <a:ea typeface="Microsoft JhengHei" pitchFamily="34" charset="-122"/>
@@ -1632,14 +1825,14 @@
       </p:sp>
       <p:sp>
         <p:nvSpPr>
-          <p:cNvPr id="19" name="Text 15"/>
-          <p:cNvSpPr/>
-          <p:nvPr/>
-        </p:nvSpPr>
-        <p:spPr>
-          <a:xfrm>
-            <a:off x="8092440" y="3456432"/>
-            <a:ext cx="3246120" cy="320040"/>
+          <p:cNvPr id="26" name="Text 20"/>
+          <p:cNvSpPr/>
+          <p:nvPr/>
+        </p:nvSpPr>
+        <p:spPr>
+          <a:xfrm>
+            <a:off x="8138160" y="3547872"/>
+            <a:ext cx="3200400" cy="320040"/>
           </a:xfrm>
           <a:prstGeom prst="rect">
             <a:avLst/>
@@ -1657,7 +1850,7 @@
             <a:r>
               <a:rPr lang="en-US" sz="1100" dirty="0">
                 <a:solidFill>
-                  <a:srgbClr val="A9CBD6"/>
+                  <a:srgbClr val="6A7A82"/>
                 </a:solidFill>
                 <a:latin typeface="Microsoft JhengHei" pitchFamily="34" charset="0"/>
                 <a:ea typeface="Microsoft JhengHei" pitchFamily="34" charset="-122"/>
@@ -1709,8 +1902,8 @@
         </p:nvSpPr>
         <p:spPr>
           <a:xfrm>
-            <a:off x="685800" y="475488"/>
-            <a:ext cx="7315200" cy="621792"/>
+            <a:off x="777240" y="502920"/>
+            <a:ext cx="7315200" cy="603504"/>
           </a:xfrm>
           <a:prstGeom prst="rect">
             <a:avLst/>
@@ -1726,9 +1919,9 @@
               <a:buNone/>
             </a:pPr>
             <a:r>
-              <a:rPr lang="en-US" sz="3400" b="1" dirty="0">
-                <a:solidFill>
-                  <a:srgbClr val="0F4C5C"/>
+              <a:rPr lang="en-US" sz="3200" b="1" dirty="0">
+                <a:solidFill>
+                  <a:srgbClr val="1F2D33"/>
                 </a:solidFill>
                 <a:latin typeface="Microsoft JhengHei" pitchFamily="34" charset="0"/>
                 <a:ea typeface="Microsoft JhengHei" pitchFamily="34" charset="-122"/>
@@ -1736,7 +1929,7 @@
               </a:rPr>
               <a:t>學歷與喜好</a:t>
             </a:r>
-            <a:endParaRPr lang="en-US" sz="3400" dirty="0"/>
+            <a:endParaRPr lang="en-US" sz="3200" dirty="0"/>
           </a:p>
         </p:txBody>
       </p:sp>
@@ -1748,7 +1941,7 @@
         </p:nvSpPr>
         <p:spPr>
           <a:xfrm>
-            <a:off x="685800" y="1133856"/>
+            <a:off x="777240" y="1152144"/>
             <a:ext cx="8229600" cy="347472"/>
           </a:xfrm>
           <a:prstGeom prst="rect">
@@ -1767,7 +1960,7 @@
             <a:r>
               <a:rPr lang="en-US" sz="1250" dirty="0">
                 <a:solidFill>
-                  <a:srgbClr val="5B707A"/>
+                  <a:srgbClr val="6A7A82"/>
                 </a:solidFill>
                 <a:latin typeface="Microsoft JhengHei" pitchFamily="34" charset="0"/>
                 <a:ea typeface="Microsoft JhengHei" pitchFamily="34" charset="-122"/>
@@ -1787,7 +1980,7 @@
         </p:nvSpPr>
         <p:spPr>
           <a:xfrm>
-            <a:off x="685800" y="1783080"/>
+            <a:off x="777240" y="1828800"/>
             <a:ext cx="402336" cy="402336"/>
           </a:xfrm>
           <a:prstGeom prst="ellipse">
@@ -1815,7 +2008,7 @@
         </p:blipFill>
         <p:spPr>
           <a:xfrm>
-            <a:off x="781812" y="1879092"/>
+            <a:off x="873252" y="1929384"/>
             <a:ext cx="210312" cy="210312"/>
           </a:xfrm>
           <a:prstGeom prst="rect">
@@ -1831,7 +2024,7 @@
         </p:nvSpPr>
         <p:spPr>
           <a:xfrm>
-            <a:off x="1225296" y="1773936"/>
+            <a:off x="1316736" y="1819656"/>
             <a:ext cx="2743200" cy="420624"/>
           </a:xfrm>
           <a:prstGeom prst="rect">
@@ -1848,9 +2041,9 @@
               <a:buNone/>
             </a:pPr>
             <a:r>
-              <a:rPr lang="en-US" sz="2000" b="1" dirty="0">
-                <a:solidFill>
-                  <a:srgbClr val="0F4C5C"/>
+              <a:rPr lang="en-US" sz="1900" b="1" dirty="0">
+                <a:solidFill>
+                  <a:srgbClr val="1F2D33"/>
                 </a:solidFill>
                 <a:latin typeface="Microsoft JhengHei" pitchFamily="34" charset="0"/>
                 <a:ea typeface="Microsoft JhengHei" pitchFamily="34" charset="-122"/>
@@ -1858,7 +2051,7 @@
               </a:rPr>
               <a:t>學歷</a:t>
             </a:r>
-            <a:endParaRPr lang="en-US" sz="2000" dirty="0"/>
+            <a:endParaRPr lang="en-US" sz="1900" dirty="0"/>
           </a:p>
         </p:txBody>
       </p:sp>
@@ -1870,18 +2063,23 @@
         </p:nvSpPr>
         <p:spPr>
           <a:xfrm>
-            <a:off x="685800" y="2359152"/>
-            <a:ext cx="5440680" cy="1225296"/>
+            <a:off x="777240" y="2487168"/>
+            <a:ext cx="5394960" cy="1389888"/>
           </a:xfrm>
           <a:prstGeom prst="roundRect">
             <a:avLst>
-              <a:gd name="adj" fmla="val 7463"/>
+              <a:gd name="adj" fmla="val 6579"/>
             </a:avLst>
           </a:prstGeom>
           <a:solidFill>
-            <a:srgbClr val="EDF4F6"/>
-          </a:solidFill>
-          <a:ln/>
+            <a:srgbClr val="FFFFFF"/>
+          </a:solidFill>
+          <a:ln w="12700">
+            <a:solidFill>
+              <a:srgbClr val="DFE7EA"/>
+            </a:solidFill>
+            <a:prstDash val="solid"/>
+          </a:ln>
         </p:spPr>
       </p:sp>
       <p:sp>
@@ -1892,8 +2090,8 @@
         </p:nvSpPr>
         <p:spPr>
           <a:xfrm>
-            <a:off x="905256" y="2468880"/>
-            <a:ext cx="5029200" cy="1005840"/>
+            <a:off x="1024128" y="2642616"/>
+            <a:ext cx="4901184" cy="1097280"/>
           </a:xfrm>
           <a:prstGeom prst="rect">
             <a:avLst/>
@@ -1910,14 +2108,14 @@
                 <a:spcPct val="112000"/>
               </a:lnSpc>
               <a:spcAft>
-                <a:spcPts val="200"/>
+                <a:spcPts val="400"/>
               </a:spcAft>
               <a:buNone/>
             </a:pPr>
             <a:r>
-              <a:rPr lang="en-US" sz="1050" b="1" dirty="0">
-                <a:solidFill>
-                  <a:srgbClr val="1F7A96"/>
+              <a:rPr lang="en-US" sz="1100" b="1" dirty="0">
+                <a:solidFill>
+                  <a:srgbClr val="2E7893"/>
                 </a:solidFill>
                 <a:latin typeface="Microsoft JhengHei" pitchFamily="34" charset="0"/>
                 <a:ea typeface="Microsoft JhengHei" pitchFamily="34" charset="-122"/>
@@ -1925,7 +2123,7 @@
               </a:rPr>
               <a:t>2024 ─ 2026・在學中</a:t>
             </a:r>
-            <a:endParaRPr lang="en-US" sz="1050" dirty="0"/>
+            <a:endParaRPr lang="en-US" sz="1100" dirty="0"/>
           </a:p>
           <a:p>
             <a:pPr indent="0" marL="0">
@@ -1933,14 +2131,14 @@
                 <a:spcPct val="112000"/>
               </a:lnSpc>
               <a:spcAft>
-                <a:spcPts val="200"/>
+                <a:spcPts val="400"/>
               </a:spcAft>
               <a:buNone/>
             </a:pPr>
             <a:r>
-              <a:rPr lang="en-US" sz="1450" b="1" dirty="0">
-                <a:solidFill>
-                  <a:srgbClr val="132B34"/>
+              <a:rPr lang="en-US" sz="1500" b="1" dirty="0">
+                <a:solidFill>
+                  <a:srgbClr val="1F2D33"/>
                 </a:solidFill>
                 <a:latin typeface="Microsoft JhengHei" pitchFamily="34" charset="0"/>
                 <a:ea typeface="Microsoft JhengHei" pitchFamily="34" charset="-122"/>
@@ -1948,7 +2146,7 @@
               </a:rPr>
               <a:t>國立高雄師範大學</a:t>
             </a:r>
-            <a:endParaRPr lang="en-US" sz="1050" dirty="0"/>
+            <a:endParaRPr lang="en-US" sz="1100" dirty="0"/>
           </a:p>
           <a:p>
             <a:pPr indent="0" marL="0">
@@ -1958,17 +2156,17 @@
               <a:buNone/>
             </a:pPr>
             <a:r>
-              <a:rPr lang="en-US" sz="1150" dirty="0">
-                <a:solidFill>
-                  <a:srgbClr val="5B707A"/>
-                </a:solidFill>
-                <a:latin typeface="Microsoft JhengHei" pitchFamily="34" charset="0"/>
-                <a:ea typeface="Microsoft JhengHei" pitchFamily="34" charset="-122"/>
-                <a:cs typeface="Microsoft JhengHei" pitchFamily="34" charset="-120"/>
-              </a:rPr>
-              <a:t>軟體工程與管理學系 碩士（夜間在職進修）</a:t>
-            </a:r>
-            <a:endParaRPr lang="en-US" sz="1050" dirty="0"/>
+              <a:rPr lang="en-US" sz="1200" dirty="0">
+                <a:solidFill>
+                  <a:srgbClr val="6A7A82"/>
+                </a:solidFill>
+                <a:latin typeface="Microsoft JhengHei" pitchFamily="34" charset="0"/>
+                <a:ea typeface="Microsoft JhengHei" pitchFamily="34" charset="-122"/>
+                <a:cs typeface="Microsoft JhengHei" pitchFamily="34" charset="-120"/>
+              </a:rPr>
+              <a:t>軟體工程與管理學系資訊科技所（夜間在職進修）</a:t>
+            </a:r>
+            <a:endParaRPr lang="en-US" sz="1100" dirty="0"/>
           </a:p>
         </p:txBody>
       </p:sp>
@@ -1980,18 +2178,23 @@
         </p:nvSpPr>
         <p:spPr>
           <a:xfrm>
-            <a:off x="685800" y="3703320"/>
-            <a:ext cx="5440680" cy="1225296"/>
+            <a:off x="777240" y="4114800"/>
+            <a:ext cx="5394960" cy="1389888"/>
           </a:xfrm>
           <a:prstGeom prst="roundRect">
             <a:avLst>
-              <a:gd name="adj" fmla="val 7463"/>
+              <a:gd name="adj" fmla="val 6579"/>
             </a:avLst>
           </a:prstGeom>
           <a:solidFill>
-            <a:srgbClr val="EDF4F6"/>
-          </a:solidFill>
-          <a:ln/>
+            <a:srgbClr val="FFFFFF"/>
+          </a:solidFill>
+          <a:ln w="12700">
+            <a:solidFill>
+              <a:srgbClr val="DFE7EA"/>
+            </a:solidFill>
+            <a:prstDash val="solid"/>
+          </a:ln>
         </p:spPr>
       </p:sp>
       <p:sp>
@@ -2002,8 +2205,8 @@
         </p:nvSpPr>
         <p:spPr>
           <a:xfrm>
-            <a:off x="905256" y="3813048"/>
-            <a:ext cx="5029200" cy="1005840"/>
+            <a:off x="1024128" y="4270248"/>
+            <a:ext cx="4901184" cy="1097280"/>
           </a:xfrm>
           <a:prstGeom prst="rect">
             <a:avLst/>
@@ -2020,22 +2223,22 @@
                 <a:spcPct val="112000"/>
               </a:lnSpc>
               <a:spcAft>
-                <a:spcPts val="200"/>
+                <a:spcPts val="400"/>
               </a:spcAft>
               <a:buNone/>
             </a:pPr>
             <a:r>
-              <a:rPr lang="en-US" sz="1050" b="1" dirty="0">
-                <a:solidFill>
-                  <a:srgbClr val="1F7A96"/>
-                </a:solidFill>
-                <a:latin typeface="Microsoft JhengHei" pitchFamily="34" charset="0"/>
-                <a:ea typeface="Microsoft JhengHei" pitchFamily="34" charset="-122"/>
-                <a:cs typeface="Microsoft JhengHei" pitchFamily="34" charset="-120"/>
-              </a:rPr>
-              <a:t>2023</a:t>
-            </a:r>
-            <a:endParaRPr lang="en-US" sz="1050" dirty="0"/>
+              <a:rPr lang="en-US" sz="1100" b="1" dirty="0">
+                <a:solidFill>
+                  <a:srgbClr val="2E7893"/>
+                </a:solidFill>
+                <a:latin typeface="Microsoft JhengHei" pitchFamily="34" charset="0"/>
+                <a:ea typeface="Microsoft JhengHei" pitchFamily="34" charset="-122"/>
+                <a:cs typeface="Microsoft JhengHei" pitchFamily="34" charset="-120"/>
+              </a:rPr>
+              <a:t>2012 ─ 2016</a:t>
+            </a:r>
+            <a:endParaRPr lang="en-US" sz="1100" dirty="0"/>
           </a:p>
           <a:p>
             <a:pPr indent="0" marL="0">
@@ -2043,22 +2246,22 @@
                 <a:spcPct val="112000"/>
               </a:lnSpc>
               <a:spcAft>
-                <a:spcPts val="200"/>
+                <a:spcPts val="400"/>
               </a:spcAft>
               <a:buNone/>
             </a:pPr>
             <a:r>
-              <a:rPr lang="en-US" sz="1450" b="1" dirty="0">
-                <a:solidFill>
-                  <a:srgbClr val="132B34"/>
-                </a:solidFill>
-                <a:latin typeface="Microsoft JhengHei" pitchFamily="34" charset="0"/>
-                <a:ea typeface="Microsoft JhengHei" pitchFamily="34" charset="-122"/>
-                <a:cs typeface="Microsoft JhengHei" pitchFamily="34" charset="-120"/>
-              </a:rPr>
-              <a:t>台南應用科技大學</a:t>
-            </a:r>
-            <a:endParaRPr lang="en-US" sz="1050" dirty="0"/>
+              <a:rPr lang="en-US" sz="1500" b="1" dirty="0">
+                <a:solidFill>
+                  <a:srgbClr val="1F2D33"/>
+                </a:solidFill>
+                <a:latin typeface="Microsoft JhengHei" pitchFamily="34" charset="0"/>
+                <a:ea typeface="Microsoft JhengHei" pitchFamily="34" charset="-122"/>
+                <a:cs typeface="Microsoft JhengHei" pitchFamily="34" charset="-120"/>
+              </a:rPr>
+              <a:t>國立屏東科技大學</a:t>
+            </a:r>
+            <a:endParaRPr lang="en-US" sz="1100" dirty="0"/>
           </a:p>
           <a:p>
             <a:pPr indent="0" marL="0">
@@ -2068,17 +2271,17 @@
               <a:buNone/>
             </a:pPr>
             <a:r>
-              <a:rPr lang="en-US" sz="1150" dirty="0">
-                <a:solidFill>
-                  <a:srgbClr val="5B707A"/>
-                </a:solidFill>
-                <a:latin typeface="Microsoft JhengHei" pitchFamily="34" charset="0"/>
-                <a:ea typeface="Microsoft JhengHei" pitchFamily="34" charset="-122"/>
-                <a:cs typeface="Microsoft JhengHei" pitchFamily="34" charset="-120"/>
-              </a:rPr>
-              <a:t>Java 全端／C# 程式開發養成班（政府產業新尖兵計畫）</a:t>
-            </a:r>
-            <a:endParaRPr lang="en-US" sz="1050" dirty="0"/>
+              <a:rPr lang="en-US" sz="1200" dirty="0">
+                <a:solidFill>
+                  <a:srgbClr val="6A7A82"/>
+                </a:solidFill>
+                <a:latin typeface="Microsoft JhengHei" pitchFamily="34" charset="0"/>
+                <a:ea typeface="Microsoft JhengHei" pitchFamily="34" charset="-122"/>
+                <a:cs typeface="Microsoft JhengHei" pitchFamily="34" charset="-120"/>
+              </a:rPr>
+              <a:t>餐旅管理系 學士</a:t>
+            </a:r>
+            <a:endParaRPr lang="en-US" sz="1100" dirty="0"/>
           </a:p>
         </p:txBody>
       </p:sp>
@@ -2090,117 +2293,7 @@
         </p:nvSpPr>
         <p:spPr>
           <a:xfrm>
-            <a:off x="685800" y="5047488"/>
-            <a:ext cx="5440680" cy="1225296"/>
-          </a:xfrm>
-          <a:prstGeom prst="roundRect">
-            <a:avLst>
-              <a:gd name="adj" fmla="val 7463"/>
-            </a:avLst>
-          </a:prstGeom>
-          <a:solidFill>
-            <a:srgbClr val="EDF4F6"/>
-          </a:solidFill>
-          <a:ln/>
-        </p:spPr>
-      </p:sp>
-      <p:sp>
-        <p:nvSpPr>
-          <p:cNvPr id="12" name="Text 9"/>
-          <p:cNvSpPr/>
-          <p:nvPr/>
-        </p:nvSpPr>
-        <p:spPr>
-          <a:xfrm>
-            <a:off x="905256" y="5157216"/>
-            <a:ext cx="5029200" cy="1005840"/>
-          </a:xfrm>
-          <a:prstGeom prst="rect">
-            <a:avLst/>
-          </a:prstGeom>
-          <a:noFill/>
-          <a:ln/>
-        </p:spPr>
-        <p:txBody>
-          <a:bodyPr wrap="square" lIns="0" tIns="0" rIns="0" bIns="0" rtlCol="0" anchor="t"/>
-          <a:lstStyle/>
-          <a:p>
-            <a:pPr indent="0" marL="0">
-              <a:lnSpc>
-                <a:spcPct val="112000"/>
-              </a:lnSpc>
-              <a:spcAft>
-                <a:spcPts val="200"/>
-              </a:spcAft>
-              <a:buNone/>
-            </a:pPr>
-            <a:r>
-              <a:rPr lang="en-US" sz="1050" b="1" dirty="0">
-                <a:solidFill>
-                  <a:srgbClr val="1F7A96"/>
-                </a:solidFill>
-                <a:latin typeface="Microsoft JhengHei" pitchFamily="34" charset="0"/>
-                <a:ea typeface="Microsoft JhengHei" pitchFamily="34" charset="-122"/>
-                <a:cs typeface="Microsoft JhengHei" pitchFamily="34" charset="-120"/>
-              </a:rPr>
-              <a:t>2012 ─ 2016</a:t>
-            </a:r>
-            <a:endParaRPr lang="en-US" sz="1050" dirty="0"/>
-          </a:p>
-          <a:p>
-            <a:pPr indent="0" marL="0">
-              <a:lnSpc>
-                <a:spcPct val="112000"/>
-              </a:lnSpc>
-              <a:spcAft>
-                <a:spcPts val="200"/>
-              </a:spcAft>
-              <a:buNone/>
-            </a:pPr>
-            <a:r>
-              <a:rPr lang="en-US" sz="1450" b="1" dirty="0">
-                <a:solidFill>
-                  <a:srgbClr val="132B34"/>
-                </a:solidFill>
-                <a:latin typeface="Microsoft JhengHei" pitchFamily="34" charset="0"/>
-                <a:ea typeface="Microsoft JhengHei" pitchFamily="34" charset="-122"/>
-                <a:cs typeface="Microsoft JhengHei" pitchFamily="34" charset="-120"/>
-              </a:rPr>
-              <a:t>國立屏東科技大學</a:t>
-            </a:r>
-            <a:endParaRPr lang="en-US" sz="1050" dirty="0"/>
-          </a:p>
-          <a:p>
-            <a:pPr indent="0" marL="0">
-              <a:lnSpc>
-                <a:spcPct val="112000"/>
-              </a:lnSpc>
-              <a:buNone/>
-            </a:pPr>
-            <a:r>
-              <a:rPr lang="en-US" sz="1150" dirty="0">
-                <a:solidFill>
-                  <a:srgbClr val="5B707A"/>
-                </a:solidFill>
-                <a:latin typeface="Microsoft JhengHei" pitchFamily="34" charset="0"/>
-                <a:ea typeface="Microsoft JhengHei" pitchFamily="34" charset="-122"/>
-                <a:cs typeface="Microsoft JhengHei" pitchFamily="34" charset="-120"/>
-              </a:rPr>
-              <a:t>餐旅管理系 學士</a:t>
-            </a:r>
-            <a:endParaRPr lang="en-US" sz="1050" dirty="0"/>
-          </a:p>
-        </p:txBody>
-      </p:sp>
-      <p:sp>
-        <p:nvSpPr>
-          <p:cNvPr id="13" name="Shape 10"/>
-          <p:cNvSpPr/>
-          <p:nvPr/>
-        </p:nvSpPr>
-        <p:spPr>
-          <a:xfrm>
-            <a:off x="6537960" y="1783080"/>
+            <a:off x="6629400" y="1828800"/>
             <a:ext cx="402336" cy="402336"/>
           </a:xfrm>
           <a:prstGeom prst="ellipse">
@@ -2214,7 +2307,7 @@
       </p:sp>
       <p:pic>
         <p:nvPicPr>
-          <p:cNvPr id="14" name="Image 1" descr="preencoded.png">    </p:cNvPr>
+          <p:cNvPr id="12" name="Image 1" descr="preencoded.png">    </p:cNvPr>
           <p:cNvPicPr>
             <a:picLocks noChangeAspect="1"/>
           </p:cNvPicPr>
@@ -2228,7 +2321,7 @@
         </p:blipFill>
         <p:spPr>
           <a:xfrm>
-            <a:off x="6643116" y="1888236"/>
+            <a:off x="6743700" y="1933956"/>
             <a:ext cx="201168" cy="201168"/>
           </a:xfrm>
           <a:prstGeom prst="rect">
@@ -2238,13 +2331,13 @@
       </p:pic>
       <p:sp>
         <p:nvSpPr>
-          <p:cNvPr id="15" name="Text 11"/>
-          <p:cNvSpPr/>
-          <p:nvPr/>
-        </p:nvSpPr>
-        <p:spPr>
-          <a:xfrm>
-            <a:off x="7077456" y="1773936"/>
+          <p:cNvPr id="13" name="Text 9"/>
+          <p:cNvSpPr/>
+          <p:nvPr/>
+        </p:nvSpPr>
+        <p:spPr>
+          <a:xfrm>
+            <a:off x="7168896" y="1819656"/>
             <a:ext cx="3200400" cy="420624"/>
           </a:xfrm>
           <a:prstGeom prst="rect">
@@ -2261,9 +2354,9 @@
               <a:buNone/>
             </a:pPr>
             <a:r>
-              <a:rPr lang="en-US" sz="2000" b="1" dirty="0">
-                <a:solidFill>
-                  <a:srgbClr val="0F4C5C"/>
+              <a:rPr lang="en-US" sz="1900" b="1" dirty="0">
+                <a:solidFill>
+                  <a:srgbClr val="1F2D33"/>
                 </a:solidFill>
                 <a:latin typeface="Microsoft JhengHei" pitchFamily="34" charset="0"/>
                 <a:ea typeface="Microsoft JhengHei" pitchFamily="34" charset="-122"/>
@@ -2271,19 +2364,19 @@
               </a:rPr>
               <a:t>喜好與興趣</a:t>
             </a:r>
-            <a:endParaRPr lang="en-US" sz="2000" dirty="0"/>
-          </a:p>
-        </p:txBody>
-      </p:sp>
-      <p:sp>
-        <p:nvSpPr>
-          <p:cNvPr id="16" name="Shape 12"/>
-          <p:cNvSpPr/>
-          <p:nvPr/>
-        </p:nvSpPr>
-        <p:spPr>
-          <a:xfrm>
-            <a:off x="6537960" y="2395728"/>
+            <a:endParaRPr lang="en-US" sz="1900" dirty="0"/>
+          </a:p>
+        </p:txBody>
+      </p:sp>
+      <p:sp>
+        <p:nvSpPr>
+          <p:cNvPr id="14" name="Shape 10"/>
+          <p:cNvSpPr/>
+          <p:nvPr/>
+        </p:nvSpPr>
+        <p:spPr>
+          <a:xfrm>
+            <a:off x="6629400" y="2542032"/>
             <a:ext cx="402336" cy="402336"/>
           </a:xfrm>
           <a:prstGeom prst="ellipse">
@@ -2297,7 +2390,7 @@
       </p:sp>
       <p:pic>
         <p:nvPicPr>
-          <p:cNvPr id="17" name="Image 2" descr="preencoded.png">    </p:cNvPr>
+          <p:cNvPr id="15" name="Image 2" descr="preencoded.png">    </p:cNvPr>
           <p:cNvPicPr>
             <a:picLocks noChangeAspect="1"/>
           </p:cNvPicPr>
@@ -2311,7 +2404,7 @@
         </p:blipFill>
         <p:spPr>
           <a:xfrm>
-            <a:off x="6638544" y="2496312"/>
+            <a:off x="6729984" y="2642616"/>
             <a:ext cx="201168" cy="201168"/>
           </a:xfrm>
           <a:prstGeom prst="rect">
@@ -2321,14 +2414,14 @@
       </p:pic>
       <p:sp>
         <p:nvSpPr>
-          <p:cNvPr id="18" name="Text 13"/>
-          <p:cNvSpPr/>
-          <p:nvPr/>
-        </p:nvSpPr>
-        <p:spPr>
-          <a:xfrm>
-            <a:off x="7077456" y="2377440"/>
-            <a:ext cx="4434840" cy="329184"/>
+          <p:cNvPr id="16" name="Text 11"/>
+          <p:cNvSpPr/>
+          <p:nvPr/>
+        </p:nvSpPr>
+        <p:spPr>
+          <a:xfrm>
+            <a:off x="7168896" y="2523744"/>
+            <a:ext cx="4343400" cy="329184"/>
           </a:xfrm>
           <a:prstGeom prst="rect">
             <a:avLst/>
@@ -2346,7 +2439,7 @@
             <a:r>
               <a:rPr lang="en-US" sz="1400" b="1" dirty="0">
                 <a:solidFill>
-                  <a:srgbClr val="132B34"/>
+                  <a:srgbClr val="1F2D33"/>
                 </a:solidFill>
                 <a:latin typeface="Microsoft JhengHei" pitchFamily="34" charset="0"/>
                 <a:ea typeface="Microsoft JhengHei" pitchFamily="34" charset="-122"/>
@@ -2360,14 +2453,14 @@
       </p:sp>
       <p:sp>
         <p:nvSpPr>
-          <p:cNvPr id="19" name="Text 14"/>
-          <p:cNvSpPr/>
-          <p:nvPr/>
-        </p:nvSpPr>
-        <p:spPr>
-          <a:xfrm>
-            <a:off x="7077456" y="2706624"/>
-            <a:ext cx="4434840" cy="566928"/>
+          <p:cNvPr id="17" name="Text 12"/>
+          <p:cNvSpPr/>
+          <p:nvPr/>
+        </p:nvSpPr>
+        <p:spPr>
+          <a:xfrm>
+            <a:off x="7168896" y="2852928"/>
+            <a:ext cx="4343400" cy="566928"/>
           </a:xfrm>
           <a:prstGeom prst="rect">
             <a:avLst/>
@@ -2388,7 +2481,7 @@
             <a:r>
               <a:rPr lang="en-US" sz="1150" dirty="0">
                 <a:solidFill>
-                  <a:srgbClr val="5B707A"/>
+                  <a:srgbClr val="6A7A82"/>
                 </a:solidFill>
                 <a:latin typeface="Microsoft JhengHei" pitchFamily="34" charset="0"/>
                 <a:ea typeface="Microsoft JhengHei" pitchFamily="34" charset="-122"/>
@@ -2402,13 +2495,13 @@
       </p:sp>
       <p:sp>
         <p:nvSpPr>
-          <p:cNvPr id="20" name="Shape 15"/>
-          <p:cNvSpPr/>
-          <p:nvPr/>
-        </p:nvSpPr>
-        <p:spPr>
-          <a:xfrm>
-            <a:off x="6537960" y="3419856"/>
+          <p:cNvPr id="18" name="Shape 13"/>
+          <p:cNvSpPr/>
+          <p:nvPr/>
+        </p:nvSpPr>
+        <p:spPr>
+          <a:xfrm>
+            <a:off x="6629400" y="3749040"/>
             <a:ext cx="402336" cy="402336"/>
           </a:xfrm>
           <a:prstGeom prst="ellipse">
@@ -2422,7 +2515,7 @@
       </p:sp>
       <p:pic>
         <p:nvPicPr>
-          <p:cNvPr id="21" name="Image 3" descr="preencoded.png">    </p:cNvPr>
+          <p:cNvPr id="19" name="Image 3" descr="preencoded.png">    </p:cNvPr>
           <p:cNvPicPr>
             <a:picLocks noChangeAspect="1"/>
           </p:cNvPicPr>
@@ -2436,7 +2529,7 @@
         </p:blipFill>
         <p:spPr>
           <a:xfrm>
-            <a:off x="6638544" y="3520440"/>
+            <a:off x="6729984" y="3849624"/>
             <a:ext cx="201168" cy="201168"/>
           </a:xfrm>
           <a:prstGeom prst="rect">
@@ -2446,14 +2539,14 @@
       </p:pic>
       <p:sp>
         <p:nvSpPr>
-          <p:cNvPr id="22" name="Text 16"/>
-          <p:cNvSpPr/>
-          <p:nvPr/>
-        </p:nvSpPr>
-        <p:spPr>
-          <a:xfrm>
-            <a:off x="7077456" y="3401568"/>
-            <a:ext cx="4434840" cy="329184"/>
+          <p:cNvPr id="20" name="Text 14"/>
+          <p:cNvSpPr/>
+          <p:nvPr/>
+        </p:nvSpPr>
+        <p:spPr>
+          <a:xfrm>
+            <a:off x="7168896" y="3730752"/>
+            <a:ext cx="4343400" cy="329184"/>
           </a:xfrm>
           <a:prstGeom prst="rect">
             <a:avLst/>
@@ -2471,7 +2564,7 @@
             <a:r>
               <a:rPr lang="en-US" sz="1400" b="1" dirty="0">
                 <a:solidFill>
-                  <a:srgbClr val="132B34"/>
+                  <a:srgbClr val="1F2D33"/>
                 </a:solidFill>
                 <a:latin typeface="Microsoft JhengHei" pitchFamily="34" charset="0"/>
                 <a:ea typeface="Microsoft JhengHei" pitchFamily="34" charset="-122"/>
@@ -2485,14 +2578,14 @@
       </p:sp>
       <p:sp>
         <p:nvSpPr>
-          <p:cNvPr id="23" name="Text 17"/>
-          <p:cNvSpPr/>
-          <p:nvPr/>
-        </p:nvSpPr>
-        <p:spPr>
-          <a:xfrm>
-            <a:off x="7077456" y="3730752"/>
-            <a:ext cx="4434840" cy="566928"/>
+          <p:cNvPr id="21" name="Text 15"/>
+          <p:cNvSpPr/>
+          <p:nvPr/>
+        </p:nvSpPr>
+        <p:spPr>
+          <a:xfrm>
+            <a:off x="7168896" y="4059936"/>
+            <a:ext cx="4343400" cy="566928"/>
           </a:xfrm>
           <a:prstGeom prst="rect">
             <a:avLst/>
@@ -2513,7 +2606,7 @@
             <a:r>
               <a:rPr lang="en-US" sz="1150" dirty="0">
                 <a:solidFill>
-                  <a:srgbClr val="5B707A"/>
+                  <a:srgbClr val="6A7A82"/>
                 </a:solidFill>
                 <a:latin typeface="Microsoft JhengHei" pitchFamily="34" charset="0"/>
                 <a:ea typeface="Microsoft JhengHei" pitchFamily="34" charset="-122"/>
@@ -2527,13 +2620,13 @@
       </p:sp>
       <p:sp>
         <p:nvSpPr>
-          <p:cNvPr id="24" name="Shape 18"/>
-          <p:cNvSpPr/>
-          <p:nvPr/>
-        </p:nvSpPr>
-        <p:spPr>
-          <a:xfrm>
-            <a:off x="6537960" y="4443984"/>
+          <p:cNvPr id="22" name="Shape 16"/>
+          <p:cNvSpPr/>
+          <p:nvPr/>
+        </p:nvSpPr>
+        <p:spPr>
+          <a:xfrm>
+            <a:off x="6629400" y="4956048"/>
             <a:ext cx="402336" cy="402336"/>
           </a:xfrm>
           <a:prstGeom prst="ellipse">
@@ -2547,7 +2640,7 @@
       </p:sp>
       <p:pic>
         <p:nvPicPr>
-          <p:cNvPr id="25" name="Image 4" descr="preencoded.png">    </p:cNvPr>
+          <p:cNvPr id="23" name="Image 4" descr="preencoded.png">    </p:cNvPr>
           <p:cNvPicPr>
             <a:picLocks noChangeAspect="1"/>
           </p:cNvPicPr>
@@ -2561,7 +2654,7 @@
         </p:blipFill>
         <p:spPr>
           <a:xfrm>
-            <a:off x="6638544" y="4544568"/>
+            <a:off x="6729984" y="5056632"/>
             <a:ext cx="201168" cy="201168"/>
           </a:xfrm>
           <a:prstGeom prst="rect">
@@ -2571,14 +2664,14 @@
       </p:pic>
       <p:sp>
         <p:nvSpPr>
-          <p:cNvPr id="26" name="Text 19"/>
-          <p:cNvSpPr/>
-          <p:nvPr/>
-        </p:nvSpPr>
-        <p:spPr>
-          <a:xfrm>
-            <a:off x="7077456" y="4425696"/>
-            <a:ext cx="4434840" cy="329184"/>
+          <p:cNvPr id="24" name="Text 17"/>
+          <p:cNvSpPr/>
+          <p:nvPr/>
+        </p:nvSpPr>
+        <p:spPr>
+          <a:xfrm>
+            <a:off x="7168896" y="4937760"/>
+            <a:ext cx="4343400" cy="329184"/>
           </a:xfrm>
           <a:prstGeom prst="rect">
             <a:avLst/>
@@ -2596,7 +2689,7 @@
             <a:r>
               <a:rPr lang="en-US" sz="1400" b="1" dirty="0">
                 <a:solidFill>
-                  <a:srgbClr val="132B34"/>
+                  <a:srgbClr val="1F2D33"/>
                 </a:solidFill>
                 <a:latin typeface="Microsoft JhengHei" pitchFamily="34" charset="0"/>
                 <a:ea typeface="Microsoft JhengHei" pitchFamily="34" charset="-122"/>
@@ -2610,14 +2703,14 @@
       </p:sp>
       <p:sp>
         <p:nvSpPr>
-          <p:cNvPr id="27" name="Text 20"/>
-          <p:cNvSpPr/>
-          <p:nvPr/>
-        </p:nvSpPr>
-        <p:spPr>
-          <a:xfrm>
-            <a:off x="7077456" y="4754880"/>
-            <a:ext cx="4434840" cy="566928"/>
+          <p:cNvPr id="25" name="Text 18"/>
+          <p:cNvSpPr/>
+          <p:nvPr/>
+        </p:nvSpPr>
+        <p:spPr>
+          <a:xfrm>
+            <a:off x="7168896" y="5266944"/>
+            <a:ext cx="4343400" cy="566928"/>
           </a:xfrm>
           <a:prstGeom prst="rect">
             <a:avLst/>
@@ -2638,138 +2731,13 @@
             <a:r>
               <a:rPr lang="en-US" sz="1150" dirty="0">
                 <a:solidFill>
-                  <a:srgbClr val="5B707A"/>
+                  <a:srgbClr val="6A7A82"/>
                 </a:solidFill>
                 <a:latin typeface="Microsoft JhengHei" pitchFamily="34" charset="0"/>
                 <a:ea typeface="Microsoft JhengHei" pitchFamily="34" charset="-122"/>
                 <a:cs typeface="Microsoft JhengHei" pitchFamily="34" charset="-120"/>
               </a:rPr>
               <a:t>當過中餐廚師與內場主管，把出餐的節奏感也帶進寫程式。</a:t>
-            </a:r>
-            <a:endParaRPr lang="en-US" sz="1150" dirty="0"/>
-          </a:p>
-        </p:txBody>
-      </p:sp>
-      <p:sp>
-        <p:nvSpPr>
-          <p:cNvPr id="28" name="Shape 21"/>
-          <p:cNvSpPr/>
-          <p:nvPr/>
-        </p:nvSpPr>
-        <p:spPr>
-          <a:xfrm>
-            <a:off x="6537960" y="5468112"/>
-            <a:ext cx="402336" cy="402336"/>
-          </a:xfrm>
-          <a:prstGeom prst="ellipse">
-            <a:avLst/>
-          </a:prstGeom>
-          <a:solidFill>
-            <a:srgbClr val="0F4C5C"/>
-          </a:solidFill>
-          <a:ln/>
-        </p:spPr>
-      </p:sp>
-      <p:pic>
-        <p:nvPicPr>
-          <p:cNvPr id="29" name="Image 5" descr="preencoded.png">    </p:cNvPr>
-          <p:cNvPicPr>
-            <a:picLocks noChangeAspect="1"/>
-          </p:cNvPicPr>
-          <p:nvPr/>
-        </p:nvPicPr>
-        <p:blipFill>
-          <a:blip r:embed="rId6"/>
-          <a:stretch>
-            <a:fillRect/>
-          </a:stretch>
-        </p:blipFill>
-        <p:spPr>
-          <a:xfrm>
-            <a:off x="6638544" y="5568696"/>
-            <a:ext cx="201168" cy="201168"/>
-          </a:xfrm>
-          <a:prstGeom prst="rect">
-            <a:avLst/>
-          </a:prstGeom>
-        </p:spPr>
-      </p:pic>
-      <p:sp>
-        <p:nvSpPr>
-          <p:cNvPr id="30" name="Text 22"/>
-          <p:cNvSpPr/>
-          <p:nvPr/>
-        </p:nvSpPr>
-        <p:spPr>
-          <a:xfrm>
-            <a:off x="7077456" y="5449824"/>
-            <a:ext cx="4434840" cy="329184"/>
-          </a:xfrm>
-          <a:prstGeom prst="rect">
-            <a:avLst/>
-          </a:prstGeom>
-          <a:noFill/>
-          <a:ln/>
-        </p:spPr>
-        <p:txBody>
-          <a:bodyPr wrap="square" lIns="0" tIns="0" rIns="0" bIns="0" rtlCol="0" anchor="ctr"/>
-          <a:lstStyle/>
-          <a:p>
-            <a:pPr indent="0" marL="0">
-              <a:buNone/>
-            </a:pPr>
-            <a:r>
-              <a:rPr lang="en-US" sz="1400" b="1" dirty="0">
-                <a:solidFill>
-                  <a:srgbClr val="132B34"/>
-                </a:solidFill>
-                <a:latin typeface="Microsoft JhengHei" pitchFamily="34" charset="0"/>
-                <a:ea typeface="Microsoft JhengHei" pitchFamily="34" charset="-122"/>
-                <a:cs typeface="Microsoft JhengHei" pitchFamily="34" charset="-120"/>
-              </a:rPr>
-              <a:t>動手做 Side Project</a:t>
-            </a:r>
-            <a:endParaRPr lang="en-US" sz="1400" dirty="0"/>
-          </a:p>
-        </p:txBody>
-      </p:sp>
-      <p:sp>
-        <p:nvSpPr>
-          <p:cNvPr id="31" name="Text 23"/>
-          <p:cNvSpPr/>
-          <p:nvPr/>
-        </p:nvSpPr>
-        <p:spPr>
-          <a:xfrm>
-            <a:off x="7077456" y="5779008"/>
-            <a:ext cx="4434840" cy="566928"/>
-          </a:xfrm>
-          <a:prstGeom prst="rect">
-            <a:avLst/>
-          </a:prstGeom>
-          <a:noFill/>
-          <a:ln/>
-        </p:spPr>
-        <p:txBody>
-          <a:bodyPr wrap="square" lIns="0" tIns="0" rIns="0" bIns="0" rtlCol="0" anchor="t"/>
-          <a:lstStyle/>
-          <a:p>
-            <a:pPr indent="0" marL="0">
-              <a:lnSpc>
-                <a:spcPct val="120000"/>
-              </a:lnSpc>
-              <a:buNone/>
-            </a:pPr>
-            <a:r>
-              <a:rPr lang="en-US" sz="1150" dirty="0">
-                <a:solidFill>
-                  <a:srgbClr val="5B707A"/>
-                </a:solidFill>
-                <a:latin typeface="Microsoft JhengHei" pitchFamily="34" charset="0"/>
-                <a:ea typeface="Microsoft JhengHei" pitchFamily="34" charset="-122"/>
-                <a:cs typeface="Microsoft JhengHei" pitchFamily="34" charset="-120"/>
-              </a:rPr>
-              <a:t>喜歡把生活興趣寫成作品，像旅遊規劃 App、烈酒知識網站。</a:t>
             </a:r>
             <a:endParaRPr lang="en-US" sz="1150" dirty="0"/>
           </a:p>

--- a/assets/docs/shane-self-intro.pptx
+++ b/assets/docs/shane-self-intro.pptx
@@ -503,7 +503,7 @@
           <a:p>
             <a:r>
               <a:rPr lang="en-US" dirty="0"/>
-              <a:t>自我介紹：黃士銘 Shane，軟體工程師。職涯經歷：餐飲業、服務業、加拿大打工度假，2023 非本科系轉職。</a:t>
+              <a:t>自我介紹：黃士銘 Shane。職涯經歷：餐飲業、服務業、加拿大打工度假，2023 非本科系轉職。IG: @mtdksya</a:t>
             </a:r>
             <a:endParaRPr lang="en-US" dirty="0"/>
           </a:p>
@@ -591,7 +591,7 @@
           <a:p>
             <a:r>
               <a:rPr lang="en-US" dirty="0"/>
-              <a:t>學歷：高師大軟體工程與管理學系資訊科技所（在學）、屏科大餐旅管理學士。喜好：出國旅遊、調酒品酒、下廚料理。</a:t>
+              <a:t>學歷：高師大軟體工程與管理學系資訊科技所（在學）、屏科大餐旅管理學士。喜好：出國旅遊、滑雪、下廚料理。</a:t>
             </a:r>
             <a:endParaRPr lang="en-US" dirty="0"/>
           </a:p>
@@ -972,7 +972,7 @@
         </p:nvSpPr>
         <p:spPr>
           <a:xfrm>
-            <a:off x="777240" y="658368"/>
+            <a:off x="777240" y="749808"/>
             <a:ext cx="5943600" cy="347472"/>
           </a:xfrm>
           <a:prstGeom prst="rect">
@@ -1011,7 +1011,7 @@
         </p:nvSpPr>
         <p:spPr>
           <a:xfrm>
-            <a:off x="777240" y="969264"/>
+            <a:off x="777240" y="1060704"/>
             <a:ext cx="6766560" cy="777240"/>
           </a:xfrm>
           <a:prstGeom prst="rect">
@@ -1064,7 +1064,7 @@
         </p:nvSpPr>
         <p:spPr>
           <a:xfrm>
-            <a:off x="777240" y="1792224"/>
+            <a:off x="777240" y="1883664"/>
             <a:ext cx="6583680" cy="384048"/>
           </a:xfrm>
           <a:prstGeom prst="rect">
@@ -1103,7 +1103,7 @@
         </p:nvSpPr>
         <p:spPr>
           <a:xfrm>
-            <a:off x="777240" y="2487168"/>
+            <a:off x="777240" y="2633472"/>
             <a:ext cx="2743200" cy="384048"/>
           </a:xfrm>
           <a:prstGeom prst="rect">
@@ -1142,7 +1142,7 @@
         </p:nvSpPr>
         <p:spPr>
           <a:xfrm>
-            <a:off x="804672" y="2999232"/>
+            <a:off x="804672" y="3200400"/>
             <a:ext cx="365760" cy="365760"/>
           </a:xfrm>
           <a:prstGeom prst="ellipse">
@@ -1170,7 +1170,7 @@
         </p:blipFill>
         <p:spPr>
           <a:xfrm>
-            <a:off x="896112" y="3090672"/>
+            <a:off x="896112" y="3291840"/>
             <a:ext cx="182880" cy="182880"/>
           </a:xfrm>
           <a:prstGeom prst="rect">
@@ -1186,8 +1186,8 @@
         </p:nvSpPr>
         <p:spPr>
           <a:xfrm>
-            <a:off x="1325880" y="2962656"/>
-            <a:ext cx="5669280" cy="310896"/>
+            <a:off x="1325880" y="3163824"/>
+            <a:ext cx="6309360" cy="310896"/>
           </a:xfrm>
           <a:prstGeom prst="rect">
             <a:avLst/>
@@ -1225,8 +1225,8 @@
         </p:nvSpPr>
         <p:spPr>
           <a:xfrm>
-            <a:off x="1325880" y="3273552"/>
-            <a:ext cx="5669280" cy="329184"/>
+            <a:off x="1325880" y="3474720"/>
+            <a:ext cx="6309360" cy="329184"/>
           </a:xfrm>
           <a:prstGeom prst="rect">
             <a:avLst/>
@@ -1264,7 +1264,7 @@
         </p:nvSpPr>
         <p:spPr>
           <a:xfrm>
-            <a:off x="804672" y="3803904"/>
+            <a:off x="804672" y="4041648"/>
             <a:ext cx="365760" cy="365760"/>
           </a:xfrm>
           <a:prstGeom prst="ellipse">
@@ -1292,7 +1292,7 @@
         </p:blipFill>
         <p:spPr>
           <a:xfrm>
-            <a:off x="896112" y="3895344"/>
+            <a:off x="896112" y="4133088"/>
             <a:ext cx="182880" cy="182880"/>
           </a:xfrm>
           <a:prstGeom prst="rect">
@@ -1308,8 +1308,8 @@
         </p:nvSpPr>
         <p:spPr>
           <a:xfrm>
-            <a:off x="1325880" y="3767328"/>
-            <a:ext cx="5669280" cy="310896"/>
+            <a:off x="1325880" y="4005072"/>
+            <a:ext cx="6309360" cy="310896"/>
           </a:xfrm>
           <a:prstGeom prst="rect">
             <a:avLst/>
@@ -1347,8 +1347,8 @@
         </p:nvSpPr>
         <p:spPr>
           <a:xfrm>
-            <a:off x="1325880" y="4078224"/>
-            <a:ext cx="5669280" cy="329184"/>
+            <a:off x="1325880" y="4315968"/>
+            <a:ext cx="6309360" cy="329184"/>
           </a:xfrm>
           <a:prstGeom prst="rect">
             <a:avLst/>
@@ -1386,7 +1386,7 @@
         </p:nvSpPr>
         <p:spPr>
           <a:xfrm>
-            <a:off x="804672" y="4608576"/>
+            <a:off x="804672" y="4882896"/>
             <a:ext cx="365760" cy="365760"/>
           </a:xfrm>
           <a:prstGeom prst="ellipse">
@@ -1414,7 +1414,7 @@
         </p:blipFill>
         <p:spPr>
           <a:xfrm>
-            <a:off x="896112" y="4700016"/>
+            <a:off x="896112" y="4974336"/>
             <a:ext cx="182880" cy="182880"/>
           </a:xfrm>
           <a:prstGeom prst="rect">
@@ -1430,8 +1430,8 @@
         </p:nvSpPr>
         <p:spPr>
           <a:xfrm>
-            <a:off x="1325880" y="4572000"/>
-            <a:ext cx="5669280" cy="310896"/>
+            <a:off x="1325880" y="4846320"/>
+            <a:ext cx="6309360" cy="310896"/>
           </a:xfrm>
           <a:prstGeom prst="rect">
             <a:avLst/>
@@ -1469,8 +1469,8 @@
         </p:nvSpPr>
         <p:spPr>
           <a:xfrm>
-            <a:off x="1325880" y="4882896"/>
-            <a:ext cx="5669280" cy="329184"/>
+            <a:off x="1325880" y="5157216"/>
+            <a:ext cx="6309360" cy="329184"/>
           </a:xfrm>
           <a:prstGeom prst="rect">
             <a:avLst/>
@@ -1494,275 +1494,15 @@
                 <a:ea typeface="Microsoft JhengHei" pitchFamily="34" charset="-122"/>
                 <a:cs typeface="Microsoft JhengHei" pitchFamily="34" charset="-120"/>
               </a:rPr>
-              <a:t>現任財團法人農漁會南區資訊中心 助理工程師</a:t>
+              <a:t>從餐旅業跨進軟體開發，目前擔任助理工程師</a:t>
             </a:r>
             <a:endParaRPr lang="en-US" sz="1150" dirty="0"/>
           </a:p>
         </p:txBody>
-      </p:sp>
-      <p:sp>
-        <p:nvSpPr>
-          <p:cNvPr id="18" name="Text 13"/>
-          <p:cNvSpPr/>
-          <p:nvPr/>
-        </p:nvSpPr>
-        <p:spPr>
-          <a:xfrm>
-            <a:off x="777240" y="5742432"/>
-            <a:ext cx="658368" cy="347472"/>
-          </a:xfrm>
-          <a:prstGeom prst="roundRect">
-            <a:avLst>
-              <a:gd name="adj" fmla="val 50000"/>
-            </a:avLst>
-          </a:prstGeom>
-          <a:solidFill>
-            <a:srgbClr val="FFFFFF"/>
-          </a:solidFill>
-          <a:ln w="12700">
-            <a:solidFill>
-              <a:srgbClr val="C6D4DA"/>
-            </a:solidFill>
-          </a:ln>
-        </p:spPr>
-        <p:txBody>
-          <a:bodyPr wrap="square" lIns="0" tIns="0" rIns="0" bIns="0" rtlCol="0" anchor="ctr"/>
-          <a:lstStyle/>
-          <a:p>
-            <a:pPr algn="ctr" indent="0" marL="0">
-              <a:buNone/>
-            </a:pPr>
-            <a:r>
-              <a:rPr lang="en-US" sz="1100" dirty="0">
-                <a:solidFill>
-                  <a:srgbClr val="3D5560"/>
-                </a:solidFill>
-                <a:latin typeface="Microsoft JhengHei" pitchFamily="34" charset="0"/>
-                <a:ea typeface="Microsoft JhengHei" pitchFamily="34" charset="-122"/>
-                <a:cs typeface="Microsoft JhengHei" pitchFamily="34" charset="-120"/>
-              </a:rPr>
-              <a:t>C#</a:t>
-            </a:r>
-            <a:endParaRPr lang="en-US" sz="1100" dirty="0"/>
-          </a:p>
-        </p:txBody>
-      </p:sp>
-      <p:sp>
-        <p:nvSpPr>
-          <p:cNvPr id="19" name="Text 14"/>
-          <p:cNvSpPr/>
-          <p:nvPr/>
-        </p:nvSpPr>
-        <p:spPr>
-          <a:xfrm>
-            <a:off x="1600200" y="5742432"/>
-            <a:ext cx="987552" cy="347472"/>
-          </a:xfrm>
-          <a:prstGeom prst="roundRect">
-            <a:avLst>
-              <a:gd name="adj" fmla="val 50000"/>
-            </a:avLst>
-          </a:prstGeom>
-          <a:solidFill>
-            <a:srgbClr val="FFFFFF"/>
-          </a:solidFill>
-          <a:ln w="12700">
-            <a:solidFill>
-              <a:srgbClr val="C6D4DA"/>
-            </a:solidFill>
-          </a:ln>
-        </p:spPr>
-        <p:txBody>
-          <a:bodyPr wrap="square" lIns="0" tIns="0" rIns="0" bIns="0" rtlCol="0" anchor="ctr"/>
-          <a:lstStyle/>
-          <a:p>
-            <a:pPr algn="ctr" indent="0" marL="0">
-              <a:buNone/>
-            </a:pPr>
-            <a:r>
-              <a:rPr lang="en-US" sz="1100" dirty="0">
-                <a:solidFill>
-                  <a:srgbClr val="3D5560"/>
-                </a:solidFill>
-                <a:latin typeface="Microsoft JhengHei" pitchFamily="34" charset="0"/>
-                <a:ea typeface="Microsoft JhengHei" pitchFamily="34" charset="-122"/>
-                <a:cs typeface="Microsoft JhengHei" pitchFamily="34" charset="-120"/>
-              </a:rPr>
-              <a:t>ASP.NET</a:t>
-            </a:r>
-            <a:endParaRPr lang="en-US" sz="1100" dirty="0"/>
-          </a:p>
-        </p:txBody>
-      </p:sp>
-      <p:sp>
-        <p:nvSpPr>
-          <p:cNvPr id="20" name="Text 15"/>
-          <p:cNvSpPr/>
-          <p:nvPr/>
-        </p:nvSpPr>
-        <p:spPr>
-          <a:xfrm>
-            <a:off x="2752344" y="5742432"/>
-            <a:ext cx="1170432" cy="347472"/>
-          </a:xfrm>
-          <a:prstGeom prst="roundRect">
-            <a:avLst>
-              <a:gd name="adj" fmla="val 50000"/>
-            </a:avLst>
-          </a:prstGeom>
-          <a:solidFill>
-            <a:srgbClr val="FFFFFF"/>
-          </a:solidFill>
-          <a:ln w="12700">
-            <a:solidFill>
-              <a:srgbClr val="C6D4DA"/>
-            </a:solidFill>
-          </a:ln>
-        </p:spPr>
-        <p:txBody>
-          <a:bodyPr wrap="square" lIns="0" tIns="0" rIns="0" bIns="0" rtlCol="0" anchor="ctr"/>
-          <a:lstStyle/>
-          <a:p>
-            <a:pPr algn="ctr" indent="0" marL="0">
-              <a:buNone/>
-            </a:pPr>
-            <a:r>
-              <a:rPr lang="en-US" sz="1100" dirty="0">
-                <a:solidFill>
-                  <a:srgbClr val="3D5560"/>
-                </a:solidFill>
-                <a:latin typeface="Microsoft JhengHei" pitchFamily="34" charset="0"/>
-                <a:ea typeface="Microsoft JhengHei" pitchFamily="34" charset="-122"/>
-                <a:cs typeface="Microsoft JhengHei" pitchFamily="34" charset="-120"/>
-              </a:rPr>
-              <a:t>SQL Server</a:t>
-            </a:r>
-            <a:endParaRPr lang="en-US" sz="1100" dirty="0"/>
-          </a:p>
-        </p:txBody>
-      </p:sp>
-      <p:sp>
-        <p:nvSpPr>
-          <p:cNvPr id="21" name="Text 16"/>
-          <p:cNvSpPr/>
-          <p:nvPr/>
-        </p:nvSpPr>
-        <p:spPr>
-          <a:xfrm>
-            <a:off x="4087368" y="5742432"/>
-            <a:ext cx="1115568" cy="347472"/>
-          </a:xfrm>
-          <a:prstGeom prst="roundRect">
-            <a:avLst>
-              <a:gd name="adj" fmla="val 50000"/>
-            </a:avLst>
-          </a:prstGeom>
-          <a:solidFill>
-            <a:srgbClr val="FFFFFF"/>
-          </a:solidFill>
-          <a:ln w="12700">
-            <a:solidFill>
-              <a:srgbClr val="C6D4DA"/>
-            </a:solidFill>
-          </a:ln>
-        </p:spPr>
-        <p:txBody>
-          <a:bodyPr wrap="square" lIns="0" tIns="0" rIns="0" bIns="0" rtlCol="0" anchor="ctr"/>
-          <a:lstStyle/>
-          <a:p>
-            <a:pPr algn="ctr" indent="0" marL="0">
-              <a:buNone/>
-            </a:pPr>
-            <a:r>
-              <a:rPr lang="en-US" sz="1100" dirty="0">
-                <a:solidFill>
-                  <a:srgbClr val="3D5560"/>
-                </a:solidFill>
-                <a:latin typeface="Microsoft JhengHei" pitchFamily="34" charset="0"/>
-                <a:ea typeface="Microsoft JhengHei" pitchFamily="34" charset="-122"/>
-                <a:cs typeface="Microsoft JhengHei" pitchFamily="34" charset="-120"/>
-              </a:rPr>
-              <a:t>JavaScript</a:t>
-            </a:r>
-            <a:endParaRPr lang="en-US" sz="1100" dirty="0"/>
-          </a:p>
-        </p:txBody>
-      </p:sp>
-      <p:sp>
-        <p:nvSpPr>
-          <p:cNvPr id="22" name="Text 17"/>
-          <p:cNvSpPr/>
-          <p:nvPr/>
-        </p:nvSpPr>
-        <p:spPr>
-          <a:xfrm>
-            <a:off x="5367528" y="5742432"/>
-            <a:ext cx="1078992" cy="347472"/>
-          </a:xfrm>
-          <a:prstGeom prst="roundRect">
-            <a:avLst>
-              <a:gd name="adj" fmla="val 50000"/>
-            </a:avLst>
-          </a:prstGeom>
-          <a:solidFill>
-            <a:srgbClr val="FFFFFF"/>
-          </a:solidFill>
-          <a:ln w="12700">
-            <a:solidFill>
-              <a:srgbClr val="C6D4DA"/>
-            </a:solidFill>
-          </a:ln>
-        </p:spPr>
-        <p:txBody>
-          <a:bodyPr wrap="square" lIns="0" tIns="0" rIns="0" bIns="0" rtlCol="0" anchor="ctr"/>
-          <a:lstStyle/>
-          <a:p>
-            <a:pPr algn="ctr" indent="0" marL="0">
-              <a:buNone/>
-            </a:pPr>
-            <a:r>
-              <a:rPr lang="en-US" sz="1100" dirty="0">
-                <a:solidFill>
-                  <a:srgbClr val="3D5560"/>
-                </a:solidFill>
-                <a:latin typeface="Microsoft JhengHei" pitchFamily="34" charset="0"/>
-                <a:ea typeface="Microsoft JhengHei" pitchFamily="34" charset="-122"/>
-                <a:cs typeface="Microsoft JhengHei" pitchFamily="34" charset="-120"/>
-              </a:rPr>
-              <a:t>LLM 微調</a:t>
-            </a:r>
-            <a:endParaRPr lang="en-US" sz="1100" dirty="0"/>
-          </a:p>
-        </p:txBody>
-      </p:sp>
-      <p:sp>
-        <p:nvSpPr>
-          <p:cNvPr id="23" name="Shape 18"/>
-          <p:cNvSpPr/>
-          <p:nvPr/>
-        </p:nvSpPr>
-        <p:spPr>
-          <a:xfrm>
-            <a:off x="8138160" y="1691640"/>
-            <a:ext cx="3200400" cy="3200400"/>
-          </a:xfrm>
-          <a:prstGeom prst="ellipse">
-            <a:avLst/>
-          </a:prstGeom>
-          <a:solidFill>
-            <a:srgbClr val="F4F8F9"/>
-          </a:solidFill>
-          <a:ln w="22225">
-            <a:solidFill>
-              <a:srgbClr val="C6D4DA"/>
-            </a:solidFill>
-            <a:prstDash val="dash"/>
-          </a:ln>
-        </p:spPr>
       </p:sp>
       <p:pic>
         <p:nvPicPr>
-          <p:cNvPr id="24" name="Image 3" descr="preencoded.png">    </p:cNvPr>
+          <p:cNvPr id="18" name="Image 3" descr="preencoded.png">    </p:cNvPr>
           <p:cNvPicPr>
             <a:picLocks noChangeAspect="1"/>
           </p:cNvPicPr>
@@ -1776,8 +1516,8 @@
         </p:blipFill>
         <p:spPr>
           <a:xfrm>
-            <a:off x="9464040" y="2487168"/>
-            <a:ext cx="548640" cy="548640"/>
+            <a:off x="804672" y="5961888"/>
+            <a:ext cx="237744" cy="237744"/>
           </a:xfrm>
           <a:prstGeom prst="rect">
             <a:avLst/>
@@ -1786,14 +1526,14 @@
       </p:pic>
       <p:sp>
         <p:nvSpPr>
-          <p:cNvPr id="25" name="Text 19"/>
-          <p:cNvSpPr/>
-          <p:nvPr/>
-        </p:nvSpPr>
-        <p:spPr>
-          <a:xfrm>
-            <a:off x="8138160" y="3127248"/>
-            <a:ext cx="3200400" cy="411480"/>
+          <p:cNvPr id="19" name="Text 13"/>
+          <p:cNvSpPr/>
+          <p:nvPr/>
+        </p:nvSpPr>
+        <p:spPr>
+          <a:xfrm>
+            <a:off x="1133856" y="5925312"/>
+            <a:ext cx="2286000" cy="310896"/>
           </a:xfrm>
           <a:prstGeom prst="rect">
             <a:avLst/>
@@ -1805,50 +1545,11 @@
           <a:bodyPr wrap="square" lIns="0" tIns="0" rIns="0" bIns="0" rtlCol="0" anchor="ctr"/>
           <a:lstStyle/>
           <a:p>
-            <a:pPr algn="ctr" indent="0" marL="0">
+            <a:pPr indent="0" marL="0">
               <a:buNone/>
             </a:pPr>
             <a:r>
-              <a:rPr lang="en-US" sz="1600" b="1" dirty="0">
-                <a:solidFill>
-                  <a:srgbClr val="1F2D33"/>
-                </a:solidFill>
-                <a:latin typeface="Microsoft JhengHei" pitchFamily="34" charset="0"/>
-                <a:ea typeface="Microsoft JhengHei" pitchFamily="34" charset="-122"/>
-                <a:cs typeface="Microsoft JhengHei" pitchFamily="34" charset="-120"/>
-              </a:rPr>
-              <a:t>個人照片</a:t>
-            </a:r>
-            <a:endParaRPr lang="en-US" sz="1600" dirty="0"/>
-          </a:p>
-        </p:txBody>
-      </p:sp>
-      <p:sp>
-        <p:nvSpPr>
-          <p:cNvPr id="26" name="Text 20"/>
-          <p:cNvSpPr/>
-          <p:nvPr/>
-        </p:nvSpPr>
-        <p:spPr>
-          <a:xfrm>
-            <a:off x="8138160" y="3547872"/>
-            <a:ext cx="3200400" cy="320040"/>
-          </a:xfrm>
-          <a:prstGeom prst="rect">
-            <a:avLst/>
-          </a:prstGeom>
-          <a:noFill/>
-          <a:ln/>
-        </p:spPr>
-        <p:txBody>
-          <a:bodyPr wrap="square" lIns="0" tIns="0" rIns="0" bIns="0" rtlCol="0" anchor="ctr"/>
-          <a:lstStyle/>
-          <a:p>
-            <a:pPr algn="ctr" indent="0" marL="0">
-              <a:buNone/>
-            </a:pPr>
-            <a:r>
-              <a:rPr lang="en-US" sz="1100" dirty="0">
+              <a:rPr lang="en-US" sz="1200" dirty="0">
                 <a:solidFill>
                   <a:srgbClr val="6A7A82"/>
                 </a:solidFill>
@@ -1856,11 +1557,62 @@
                 <a:ea typeface="Microsoft JhengHei" pitchFamily="34" charset="-122"/>
                 <a:cs typeface="Microsoft JhengHei" pitchFamily="34" charset="-120"/>
               </a:rPr>
-              <a:t>（此處預留照片位置）</a:t>
-            </a:r>
-            <a:endParaRPr lang="en-US" sz="1100" dirty="0"/>
-          </a:p>
-        </p:txBody>
+              <a:t>@mtdksya</a:t>
+            </a:r>
+            <a:endParaRPr lang="en-US" sz="1200" dirty="0"/>
+          </a:p>
+        </p:txBody>
+      </p:sp>
+      <p:pic>
+        <p:nvPicPr>
+          <p:cNvPr id="20" name="Image 4" descr="preencoded.png">    </p:cNvPr>
+          <p:cNvPicPr>
+            <a:picLocks noChangeAspect="1"/>
+          </p:cNvPicPr>
+          <p:nvPr/>
+        </p:nvPicPr>
+        <p:blipFill>
+          <a:blip r:embed="rId5"/>
+          <a:stretch>
+            <a:fillRect/>
+          </a:stretch>
+        </p:blipFill>
+        <p:spPr>
+          <a:xfrm>
+            <a:off x="8403336" y="548640"/>
+            <a:ext cx="3236976" cy="5760720"/>
+          </a:xfrm>
+          <a:prstGeom prst="rect">
+            <a:avLst/>
+          </a:prstGeom>
+        </p:spPr>
+      </p:pic>
+      <p:sp>
+        <p:nvSpPr>
+          <p:cNvPr id="21" name="Shape 14"/>
+          <p:cNvSpPr/>
+          <p:nvPr/>
+        </p:nvSpPr>
+        <p:spPr>
+          <a:xfrm>
+            <a:off x="8403336" y="548640"/>
+            <a:ext cx="3236976" cy="5760720"/>
+          </a:xfrm>
+          <a:prstGeom prst="rect">
+            <a:avLst/>
+          </a:prstGeom>
+          <a:solidFill>
+            <a:srgbClr val="FFFFFF">
+              <a:alpha val="0"/>
+            </a:srgbClr>
+          </a:solidFill>
+          <a:ln w="12700">
+            <a:solidFill>
+              <a:srgbClr val="DFE7EA"/>
+            </a:solidFill>
+            <a:prstDash val="solid"/>
+          </a:ln>
+        </p:spPr>
       </p:sp>
     </p:spTree>
   </p:cSld>
@@ -2570,7 +2322,7 @@
                 <a:ea typeface="Microsoft JhengHei" pitchFamily="34" charset="-122"/>
                 <a:cs typeface="Microsoft JhengHei" pitchFamily="34" charset="-120"/>
               </a:rPr>
-              <a:t>調酒與品酒</a:t>
+              <a:t>滑雪</a:t>
             </a:r>
             <a:endParaRPr lang="en-US" sz="1400" dirty="0"/>
           </a:p>
@@ -2612,7 +2364,7 @@
                 <a:ea typeface="Microsoft JhengHei" pitchFamily="34" charset="-122"/>
                 <a:cs typeface="Microsoft JhengHei" pitchFamily="34" charset="-120"/>
               </a:rPr>
-              <a:t>持有丙級調酒技術士證照，喜歡研究各種烈酒的產地與故事。</a:t>
+              <a:t>在加拿大愛上滑雪，每到雪季就想上山報到。</a:t>
             </a:r>
             <a:endParaRPr lang="en-US" sz="1150" dirty="0"/>
           </a:p>

--- a/assets/docs/shane-self-intro.pptx
+++ b/assets/docs/shane-self-intro.pptx
@@ -972,7 +972,7 @@
         </p:nvSpPr>
         <p:spPr>
           <a:xfrm>
-            <a:off x="777240" y="749808"/>
+            <a:off x="777240" y="1024128"/>
             <a:ext cx="5943600" cy="347472"/>
           </a:xfrm>
           <a:prstGeom prst="rect">
@@ -1011,7 +1011,7 @@
         </p:nvSpPr>
         <p:spPr>
           <a:xfrm>
-            <a:off x="777240" y="1060704"/>
+            <a:off x="777240" y="1335024"/>
             <a:ext cx="6766560" cy="777240"/>
           </a:xfrm>
           <a:prstGeom prst="rect">
@@ -1064,46 +1064,7 @@
         </p:nvSpPr>
         <p:spPr>
           <a:xfrm>
-            <a:off x="777240" y="1883664"/>
-            <a:ext cx="6583680" cy="384048"/>
-          </a:xfrm>
-          <a:prstGeom prst="rect">
-            <a:avLst/>
-          </a:prstGeom>
-          <a:noFill/>
-          <a:ln/>
-        </p:spPr>
-        <p:txBody>
-          <a:bodyPr wrap="square" lIns="0" tIns="0" rIns="0" bIns="0" rtlCol="0" anchor="ctr"/>
-          <a:lstStyle/>
-          <a:p>
-            <a:pPr indent="0" marL="0">
-              <a:buNone/>
-            </a:pPr>
-            <a:r>
-              <a:rPr lang="en-US" sz="1700" b="1" dirty="0">
-                <a:solidFill>
-                  <a:srgbClr val="6A7A82"/>
-                </a:solidFill>
-                <a:latin typeface="Microsoft JhengHei" pitchFamily="34" charset="0"/>
-                <a:ea typeface="Microsoft JhengHei" pitchFamily="34" charset="-122"/>
-                <a:cs typeface="Microsoft JhengHei" pitchFamily="34" charset="-120"/>
-              </a:rPr>
-              <a:t>軟體工程師 ・ AI 應用工程師</a:t>
-            </a:r>
-            <a:endParaRPr lang="en-US" sz="1700" dirty="0"/>
-          </a:p>
-        </p:txBody>
-      </p:sp>
-      <p:sp>
-        <p:nvSpPr>
-          <p:cNvPr id="5" name="Text 3"/>
-          <p:cNvSpPr/>
-          <p:nvPr/>
-        </p:nvSpPr>
-        <p:spPr>
-          <a:xfrm>
-            <a:off x="777240" y="2633472"/>
+            <a:off x="777240" y="2724912"/>
             <a:ext cx="2743200" cy="384048"/>
           </a:xfrm>
           <a:prstGeom prst="rect">
@@ -1136,13 +1097,13 @@
       </p:sp>
       <p:sp>
         <p:nvSpPr>
-          <p:cNvPr id="6" name="Shape 4"/>
-          <p:cNvSpPr/>
-          <p:nvPr/>
-        </p:nvSpPr>
-        <p:spPr>
-          <a:xfrm>
-            <a:off x="804672" y="3200400"/>
+          <p:cNvPr id="5" name="Shape 3"/>
+          <p:cNvSpPr/>
+          <p:nvPr/>
+        </p:nvSpPr>
+        <p:spPr>
+          <a:xfrm>
+            <a:off x="804672" y="3291840"/>
             <a:ext cx="365760" cy="365760"/>
           </a:xfrm>
           <a:prstGeom prst="ellipse">
@@ -1156,7 +1117,7 @@
       </p:sp>
       <p:pic>
         <p:nvPicPr>
-          <p:cNvPr id="7" name="Image 0" descr="preencoded.png">    </p:cNvPr>
+          <p:cNvPr id="6" name="Image 0" descr="preencoded.png">    </p:cNvPr>
           <p:cNvPicPr>
             <a:picLocks noChangeAspect="1"/>
           </p:cNvPicPr>
@@ -1170,7 +1131,7 @@
         </p:blipFill>
         <p:spPr>
           <a:xfrm>
-            <a:off x="896112" y="3291840"/>
+            <a:off x="896112" y="3383280"/>
             <a:ext cx="182880" cy="182880"/>
           </a:xfrm>
           <a:prstGeom prst="rect">
@@ -1180,13 +1141,13 @@
       </p:pic>
       <p:sp>
         <p:nvSpPr>
-          <p:cNvPr id="8" name="Text 5"/>
-          <p:cNvSpPr/>
-          <p:nvPr/>
-        </p:nvSpPr>
-        <p:spPr>
-          <a:xfrm>
-            <a:off x="1325880" y="3163824"/>
+          <p:cNvPr id="7" name="Text 4"/>
+          <p:cNvSpPr/>
+          <p:nvPr/>
+        </p:nvSpPr>
+        <p:spPr>
+          <a:xfrm>
+            <a:off x="1325880" y="3255264"/>
             <a:ext cx="6309360" cy="310896"/>
           </a:xfrm>
           <a:prstGeom prst="rect">
@@ -1219,13 +1180,13 @@
       </p:sp>
       <p:sp>
         <p:nvSpPr>
-          <p:cNvPr id="9" name="Text 6"/>
-          <p:cNvSpPr/>
-          <p:nvPr/>
-        </p:nvSpPr>
-        <p:spPr>
-          <a:xfrm>
-            <a:off x="1325880" y="3474720"/>
+          <p:cNvPr id="8" name="Text 5"/>
+          <p:cNvSpPr/>
+          <p:nvPr/>
+        </p:nvSpPr>
+        <p:spPr>
+          <a:xfrm>
+            <a:off x="1325880" y="3566160"/>
             <a:ext cx="6309360" cy="329184"/>
           </a:xfrm>
           <a:prstGeom prst="rect">
@@ -1258,13 +1219,13 @@
       </p:sp>
       <p:sp>
         <p:nvSpPr>
-          <p:cNvPr id="10" name="Shape 7"/>
-          <p:cNvSpPr/>
-          <p:nvPr/>
-        </p:nvSpPr>
-        <p:spPr>
-          <a:xfrm>
-            <a:off x="804672" y="4041648"/>
+          <p:cNvPr id="9" name="Shape 6"/>
+          <p:cNvSpPr/>
+          <p:nvPr/>
+        </p:nvSpPr>
+        <p:spPr>
+          <a:xfrm>
+            <a:off x="804672" y="4133088"/>
             <a:ext cx="365760" cy="365760"/>
           </a:xfrm>
           <a:prstGeom prst="ellipse">
@@ -1278,7 +1239,7 @@
       </p:sp>
       <p:pic>
         <p:nvPicPr>
-          <p:cNvPr id="11" name="Image 1" descr="preencoded.png">    </p:cNvPr>
+          <p:cNvPr id="10" name="Image 1" descr="preencoded.png">    </p:cNvPr>
           <p:cNvPicPr>
             <a:picLocks noChangeAspect="1"/>
           </p:cNvPicPr>
@@ -1292,7 +1253,7 @@
         </p:blipFill>
         <p:spPr>
           <a:xfrm>
-            <a:off x="896112" y="4133088"/>
+            <a:off x="896112" y="4224528"/>
             <a:ext cx="182880" cy="182880"/>
           </a:xfrm>
           <a:prstGeom prst="rect">
@@ -1302,13 +1263,13 @@
       </p:pic>
       <p:sp>
         <p:nvSpPr>
-          <p:cNvPr id="12" name="Text 8"/>
-          <p:cNvSpPr/>
-          <p:nvPr/>
-        </p:nvSpPr>
-        <p:spPr>
-          <a:xfrm>
-            <a:off x="1325880" y="4005072"/>
+          <p:cNvPr id="11" name="Text 7"/>
+          <p:cNvSpPr/>
+          <p:nvPr/>
+        </p:nvSpPr>
+        <p:spPr>
+          <a:xfrm>
+            <a:off x="1325880" y="4096512"/>
             <a:ext cx="6309360" cy="310896"/>
           </a:xfrm>
           <a:prstGeom prst="rect">
@@ -1341,13 +1302,13 @@
       </p:sp>
       <p:sp>
         <p:nvSpPr>
-          <p:cNvPr id="13" name="Text 9"/>
-          <p:cNvSpPr/>
-          <p:nvPr/>
-        </p:nvSpPr>
-        <p:spPr>
-          <a:xfrm>
-            <a:off x="1325880" y="4315968"/>
+          <p:cNvPr id="12" name="Text 8"/>
+          <p:cNvSpPr/>
+          <p:nvPr/>
+        </p:nvSpPr>
+        <p:spPr>
+          <a:xfrm>
+            <a:off x="1325880" y="4407408"/>
             <a:ext cx="6309360" cy="329184"/>
           </a:xfrm>
           <a:prstGeom prst="rect">
@@ -1380,13 +1341,13 @@
       </p:sp>
       <p:sp>
         <p:nvSpPr>
-          <p:cNvPr id="14" name="Shape 10"/>
-          <p:cNvSpPr/>
-          <p:nvPr/>
-        </p:nvSpPr>
-        <p:spPr>
-          <a:xfrm>
-            <a:off x="804672" y="4882896"/>
+          <p:cNvPr id="13" name="Shape 9"/>
+          <p:cNvSpPr/>
+          <p:nvPr/>
+        </p:nvSpPr>
+        <p:spPr>
+          <a:xfrm>
+            <a:off x="804672" y="4974336"/>
             <a:ext cx="365760" cy="365760"/>
           </a:xfrm>
           <a:prstGeom prst="ellipse">
@@ -1400,7 +1361,7 @@
       </p:sp>
       <p:pic>
         <p:nvPicPr>
-          <p:cNvPr id="15" name="Image 2" descr="preencoded.png">    </p:cNvPr>
+          <p:cNvPr id="14" name="Image 2" descr="preencoded.png">    </p:cNvPr>
           <p:cNvPicPr>
             <a:picLocks noChangeAspect="1"/>
           </p:cNvPicPr>
@@ -1414,7 +1375,7 @@
         </p:blipFill>
         <p:spPr>
           <a:xfrm>
-            <a:off x="896112" y="4974336"/>
+            <a:off x="896112" y="5065776"/>
             <a:ext cx="182880" cy="182880"/>
           </a:xfrm>
           <a:prstGeom prst="rect">
@@ -1424,13 +1385,13 @@
       </p:pic>
       <p:sp>
         <p:nvSpPr>
-          <p:cNvPr id="16" name="Text 11"/>
-          <p:cNvSpPr/>
-          <p:nvPr/>
-        </p:nvSpPr>
-        <p:spPr>
-          <a:xfrm>
-            <a:off x="1325880" y="4846320"/>
+          <p:cNvPr id="15" name="Text 10"/>
+          <p:cNvSpPr/>
+          <p:nvPr/>
+        </p:nvSpPr>
+        <p:spPr>
+          <a:xfrm>
+            <a:off x="1325880" y="4937760"/>
             <a:ext cx="6309360" cy="310896"/>
           </a:xfrm>
           <a:prstGeom prst="rect">
@@ -1463,13 +1424,13 @@
       </p:sp>
       <p:sp>
         <p:nvSpPr>
-          <p:cNvPr id="17" name="Text 12"/>
-          <p:cNvSpPr/>
-          <p:nvPr/>
-        </p:nvSpPr>
-        <p:spPr>
-          <a:xfrm>
-            <a:off x="1325880" y="5157216"/>
+          <p:cNvPr id="16" name="Text 11"/>
+          <p:cNvSpPr/>
+          <p:nvPr/>
+        </p:nvSpPr>
+        <p:spPr>
+          <a:xfrm>
+            <a:off x="1325880" y="5248656"/>
             <a:ext cx="6309360" cy="329184"/>
           </a:xfrm>
           <a:prstGeom prst="rect">
@@ -1494,7 +1455,7 @@
                 <a:ea typeface="Microsoft JhengHei" pitchFamily="34" charset="-122"/>
                 <a:cs typeface="Microsoft JhengHei" pitchFamily="34" charset="-120"/>
               </a:rPr>
-              <a:t>從餐旅業跨進軟體開發，目前擔任助理工程師</a:t>
+              <a:t>透過政府轉職養成班，從餐旅業跨進軟體開發</a:t>
             </a:r>
             <a:endParaRPr lang="en-US" sz="1150" dirty="0"/>
           </a:p>
@@ -1502,7 +1463,7 @@
       </p:sp>
       <p:pic>
         <p:nvPicPr>
-          <p:cNvPr id="18" name="Image 3" descr="preencoded.png">    </p:cNvPr>
+          <p:cNvPr id="17" name="Image 3" descr="preencoded.png">    </p:cNvPr>
           <p:cNvPicPr>
             <a:picLocks noChangeAspect="1"/>
           </p:cNvPicPr>
@@ -1526,7 +1487,7 @@
       </p:pic>
       <p:sp>
         <p:nvSpPr>
-          <p:cNvPr id="19" name="Text 13"/>
+          <p:cNvPr id="18" name="Text 12"/>
           <p:cNvSpPr/>
           <p:nvPr/>
         </p:nvSpPr>
@@ -1565,7 +1526,7 @@
       </p:sp>
       <p:pic>
         <p:nvPicPr>
-          <p:cNvPr id="20" name="Image 4" descr="preencoded.png">    </p:cNvPr>
+          <p:cNvPr id="19" name="Image 4" descr="preencoded.png">    </p:cNvPr>
           <p:cNvPicPr>
             <a:picLocks noChangeAspect="1"/>
           </p:cNvPicPr>
@@ -1589,7 +1550,7 @@
       </p:pic>
       <p:sp>
         <p:nvSpPr>
-          <p:cNvPr id="21" name="Shape 14"/>
+          <p:cNvPr id="20" name="Shape 13"/>
           <p:cNvSpPr/>
           <p:nvPr/>
         </p:nvSpPr>
@@ -1598,8 +1559,10 @@
             <a:off x="8403336" y="548640"/>
             <a:ext cx="3236976" cy="5760720"/>
           </a:xfrm>
-          <a:prstGeom prst="rect">
-            <a:avLst/>
+          <a:prstGeom prst="roundRect">
+            <a:avLst>
+              <a:gd name="adj" fmla="val 4237"/>
+            </a:avLst>
           </a:prstGeom>
           <a:solidFill>
             <a:srgbClr val="FFFFFF">

--- a/assets/docs/shane-self-intro.pptx
+++ b/assets/docs/shane-self-intro.pptx
@@ -503,7 +503,7 @@
           <a:p>
             <a:r>
               <a:rPr lang="en-US" dirty="0"/>
-              <a:t>自我介紹：黃士銘 Shane。職涯經歷：餐飲業、服務業、加拿大打工度假，2023 非本科系轉職。IG: @mtdksya</a:t>
+              <a:t>自我介紹：黃士銘 Shane。職涯經歷：餐飲業、服務業、加拿大打工度假，2023 非本科系轉職。</a:t>
             </a:r>
             <a:endParaRPr lang="en-US" dirty="0"/>
           </a:p>
@@ -591,7 +591,7 @@
           <a:p>
             <a:r>
               <a:rPr lang="en-US" dirty="0"/>
-              <a:t>學歷：高師大軟體工程與管理學系資訊科技所（在學）、屏科大餐旅管理學士。喜好：出國旅遊、滑雪、下廚料理。</a:t>
+              <a:t>學歷：高師大軟體工程與管理學系資訊科技所、屏科大餐旅管理學士。喜好：出國旅遊、滑雪。</a:t>
             </a:r>
             <a:endParaRPr lang="en-US" dirty="0"/>
           </a:p>
@@ -1463,69 +1463,6 @@
       </p:sp>
       <p:pic>
         <p:nvPicPr>
-          <p:cNvPr id="17" name="Image 3" descr="preencoded.png">    </p:cNvPr>
-          <p:cNvPicPr>
-            <a:picLocks noChangeAspect="1"/>
-          </p:cNvPicPr>
-          <p:nvPr/>
-        </p:nvPicPr>
-        <p:blipFill>
-          <a:blip r:embed="rId4"/>
-          <a:stretch>
-            <a:fillRect/>
-          </a:stretch>
-        </p:blipFill>
-        <p:spPr>
-          <a:xfrm>
-            <a:off x="804672" y="5961888"/>
-            <a:ext cx="237744" cy="237744"/>
-          </a:xfrm>
-          <a:prstGeom prst="rect">
-            <a:avLst/>
-          </a:prstGeom>
-        </p:spPr>
-      </p:pic>
-      <p:sp>
-        <p:nvSpPr>
-          <p:cNvPr id="18" name="Text 12"/>
-          <p:cNvSpPr/>
-          <p:nvPr/>
-        </p:nvSpPr>
-        <p:spPr>
-          <a:xfrm>
-            <a:off x="1133856" y="5925312"/>
-            <a:ext cx="2286000" cy="310896"/>
-          </a:xfrm>
-          <a:prstGeom prst="rect">
-            <a:avLst/>
-          </a:prstGeom>
-          <a:noFill/>
-          <a:ln/>
-        </p:spPr>
-        <p:txBody>
-          <a:bodyPr wrap="square" lIns="0" tIns="0" rIns="0" bIns="0" rtlCol="0" anchor="ctr"/>
-          <a:lstStyle/>
-          <a:p>
-            <a:pPr indent="0" marL="0">
-              <a:buNone/>
-            </a:pPr>
-            <a:r>
-              <a:rPr lang="en-US" sz="1200" dirty="0">
-                <a:solidFill>
-                  <a:srgbClr val="6A7A82"/>
-                </a:solidFill>
-                <a:latin typeface="Microsoft JhengHei" pitchFamily="34" charset="0"/>
-                <a:ea typeface="Microsoft JhengHei" pitchFamily="34" charset="-122"/>
-                <a:cs typeface="Microsoft JhengHei" pitchFamily="34" charset="-120"/>
-              </a:rPr>
-              <a:t>@mtdksya</a:t>
-            </a:r>
-            <a:endParaRPr lang="en-US" sz="1200" dirty="0"/>
-          </a:p>
-        </p:txBody>
-      </p:sp>
-      <p:pic>
-        <p:nvPicPr>
           <p:cNvPr id="19" name="Image 4" descr="preencoded.png">    </p:cNvPr>
           <p:cNvPicPr>
             <a:picLocks noChangeAspect="1"/>
@@ -1836,7 +1773,7 @@
                 <a:ea typeface="Microsoft JhengHei" pitchFamily="34" charset="-122"/>
                 <a:cs typeface="Microsoft JhengHei" pitchFamily="34" charset="-120"/>
               </a:rPr>
-              <a:t>2024 ─ 2026・在學中</a:t>
+              <a:t>2024 ─ 2026</a:t>
             </a:r>
             <a:endParaRPr lang="en-US" sz="1100" dirty="0"/>
           </a:p>
@@ -2091,7 +2028,7 @@
         </p:nvSpPr>
         <p:spPr>
           <a:xfrm>
-            <a:off x="6629400" y="2542032"/>
+            <a:off x="6629400" y="2743200"/>
             <a:ext cx="402336" cy="402336"/>
           </a:xfrm>
           <a:prstGeom prst="ellipse">
@@ -2119,7 +2056,7 @@
         </p:blipFill>
         <p:spPr>
           <a:xfrm>
-            <a:off x="6729984" y="2642616"/>
+            <a:off x="6729984" y="2843784"/>
             <a:ext cx="201168" cy="201168"/>
           </a:xfrm>
           <a:prstGeom prst="rect">
@@ -2135,7 +2072,7 @@
         </p:nvSpPr>
         <p:spPr>
           <a:xfrm>
-            <a:off x="7168896" y="2523744"/>
+            <a:off x="7168896" y="2724912"/>
             <a:ext cx="4343400" cy="329184"/>
           </a:xfrm>
           <a:prstGeom prst="rect">
@@ -2174,7 +2111,7 @@
         </p:nvSpPr>
         <p:spPr>
           <a:xfrm>
-            <a:off x="7168896" y="2852928"/>
+            <a:off x="7168896" y="3054096"/>
             <a:ext cx="4343400" cy="566928"/>
           </a:xfrm>
           <a:prstGeom prst="rect">
@@ -2216,7 +2153,7 @@
         </p:nvSpPr>
         <p:spPr>
           <a:xfrm>
-            <a:off x="6629400" y="3749040"/>
+            <a:off x="6629400" y="4370832"/>
             <a:ext cx="402336" cy="402336"/>
           </a:xfrm>
           <a:prstGeom prst="ellipse">
@@ -2244,7 +2181,7 @@
         </p:blipFill>
         <p:spPr>
           <a:xfrm>
-            <a:off x="6729984" y="3849624"/>
+            <a:off x="6729984" y="4471416"/>
             <a:ext cx="201168" cy="201168"/>
           </a:xfrm>
           <a:prstGeom prst="rect">
@@ -2260,7 +2197,7 @@
         </p:nvSpPr>
         <p:spPr>
           <a:xfrm>
-            <a:off x="7168896" y="3730752"/>
+            <a:off x="7168896" y="4352544"/>
             <a:ext cx="4343400" cy="329184"/>
           </a:xfrm>
           <a:prstGeom prst="rect">
@@ -2299,7 +2236,7 @@
         </p:nvSpPr>
         <p:spPr>
           <a:xfrm>
-            <a:off x="7168896" y="4059936"/>
+            <a:off x="7168896" y="4681728"/>
             <a:ext cx="4343400" cy="566928"/>
           </a:xfrm>
           <a:prstGeom prst="rect">
@@ -2328,131 +2265,6 @@
                 <a:cs typeface="Microsoft JhengHei" pitchFamily="34" charset="-120"/>
               </a:rPr>
               <a:t>在加拿大愛上滑雪，每到雪季就想上山報到。</a:t>
-            </a:r>
-            <a:endParaRPr lang="en-US" sz="1150" dirty="0"/>
-          </a:p>
-        </p:txBody>
-      </p:sp>
-      <p:sp>
-        <p:nvSpPr>
-          <p:cNvPr id="22" name="Shape 16"/>
-          <p:cNvSpPr/>
-          <p:nvPr/>
-        </p:nvSpPr>
-        <p:spPr>
-          <a:xfrm>
-            <a:off x="6629400" y="4956048"/>
-            <a:ext cx="402336" cy="402336"/>
-          </a:xfrm>
-          <a:prstGeom prst="ellipse">
-            <a:avLst/>
-          </a:prstGeom>
-          <a:solidFill>
-            <a:srgbClr val="0F4C5C"/>
-          </a:solidFill>
-          <a:ln/>
-        </p:spPr>
-      </p:sp>
-      <p:pic>
-        <p:nvPicPr>
-          <p:cNvPr id="23" name="Image 4" descr="preencoded.png">    </p:cNvPr>
-          <p:cNvPicPr>
-            <a:picLocks noChangeAspect="1"/>
-          </p:cNvPicPr>
-          <p:nvPr/>
-        </p:nvPicPr>
-        <p:blipFill>
-          <a:blip r:embed="rId5"/>
-          <a:stretch>
-            <a:fillRect/>
-          </a:stretch>
-        </p:blipFill>
-        <p:spPr>
-          <a:xfrm>
-            <a:off x="6729984" y="5056632"/>
-            <a:ext cx="201168" cy="201168"/>
-          </a:xfrm>
-          <a:prstGeom prst="rect">
-            <a:avLst/>
-          </a:prstGeom>
-        </p:spPr>
-      </p:pic>
-      <p:sp>
-        <p:nvSpPr>
-          <p:cNvPr id="24" name="Text 17"/>
-          <p:cNvSpPr/>
-          <p:nvPr/>
-        </p:nvSpPr>
-        <p:spPr>
-          <a:xfrm>
-            <a:off x="7168896" y="4937760"/>
-            <a:ext cx="4343400" cy="329184"/>
-          </a:xfrm>
-          <a:prstGeom prst="rect">
-            <a:avLst/>
-          </a:prstGeom>
-          <a:noFill/>
-          <a:ln/>
-        </p:spPr>
-        <p:txBody>
-          <a:bodyPr wrap="square" lIns="0" tIns="0" rIns="0" bIns="0" rtlCol="0" anchor="ctr"/>
-          <a:lstStyle/>
-          <a:p>
-            <a:pPr indent="0" marL="0">
-              <a:buNone/>
-            </a:pPr>
-            <a:r>
-              <a:rPr lang="en-US" sz="1400" b="1" dirty="0">
-                <a:solidFill>
-                  <a:srgbClr val="1F2D33"/>
-                </a:solidFill>
-                <a:latin typeface="Microsoft JhengHei" pitchFamily="34" charset="0"/>
-                <a:ea typeface="Microsoft JhengHei" pitchFamily="34" charset="-122"/>
-                <a:cs typeface="Microsoft JhengHei" pitchFamily="34" charset="-120"/>
-              </a:rPr>
-              <a:t>下廚料理</a:t>
-            </a:r>
-            <a:endParaRPr lang="en-US" sz="1400" dirty="0"/>
-          </a:p>
-        </p:txBody>
-      </p:sp>
-      <p:sp>
-        <p:nvSpPr>
-          <p:cNvPr id="25" name="Text 18"/>
-          <p:cNvSpPr/>
-          <p:nvPr/>
-        </p:nvSpPr>
-        <p:spPr>
-          <a:xfrm>
-            <a:off x="7168896" y="5266944"/>
-            <a:ext cx="4343400" cy="566928"/>
-          </a:xfrm>
-          <a:prstGeom prst="rect">
-            <a:avLst/>
-          </a:prstGeom>
-          <a:noFill/>
-          <a:ln/>
-        </p:spPr>
-        <p:txBody>
-          <a:bodyPr wrap="square" lIns="0" tIns="0" rIns="0" bIns="0" rtlCol="0" anchor="t"/>
-          <a:lstStyle/>
-          <a:p>
-            <a:pPr indent="0" marL="0">
-              <a:lnSpc>
-                <a:spcPct val="120000"/>
-              </a:lnSpc>
-              <a:buNone/>
-            </a:pPr>
-            <a:r>
-              <a:rPr lang="en-US" sz="1150" dirty="0">
-                <a:solidFill>
-                  <a:srgbClr val="6A7A82"/>
-                </a:solidFill>
-                <a:latin typeface="Microsoft JhengHei" pitchFamily="34" charset="0"/>
-                <a:ea typeface="Microsoft JhengHei" pitchFamily="34" charset="-122"/>
-                <a:cs typeface="Microsoft JhengHei" pitchFamily="34" charset="-120"/>
-              </a:rPr>
-              <a:t>當過中餐廚師與內場主管，把出餐的節奏感也帶進寫程式。</a:t>
             </a:r>
             <a:endParaRPr lang="en-US" sz="1150" dirty="0"/>
           </a:p>
